--- a/lessons/6-3/slides.pptx
+++ b/lessons/6-3/slides.pptx
@@ -10925,7 +10925,7 @@
       </p:sp>
       <p:sp>
         <p:nvSpPr>
-          <p:cNvPr id="20" name="Shape 18"/>
+          <p:cNvPr id="20" name="Text 18"/>
           <p:cNvSpPr/>
           <p:nvPr/>
         </p:nvSpPr>
@@ -10946,33 +10946,7 @@
             <a:solidFill>
               <a:srgbClr val="D6DBDF"/>
             </a:solidFill>
-            <a:prstDash val="solid"/>
           </a:ln>
-          <a:effectLst>
-            <a:outerShdw sx="100000" sy="100000" kx="0" ky="0" algn="bl" rotWithShape="0" blurRad="50800" dist="12700" dir="5400000">
-              <a:srgbClr val="1C2E42">
-                <a:alpha val="10000"/>
-              </a:srgbClr>
-            </a:outerShdw>
-          </a:effectLst>
-        </p:spPr>
-      </p:sp>
-      <p:sp>
-        <p:nvSpPr>
-          <p:cNvPr id="21" name="Text 19"/>
-          <p:cNvSpPr/>
-          <p:nvPr/>
-        </p:nvSpPr>
-        <p:spPr>
-          <a:xfrm>
-            <a:off x="685800" y="1481328"/>
-            <a:ext cx="1447800" cy="384048"/>
-          </a:xfrm>
-          <a:prstGeom prst="rect">
-            <a:avLst/>
-          </a:prstGeom>
-          <a:noFill/>
-          <a:ln/>
         </p:spPr>
         <p:txBody>
           <a:bodyPr wrap="square" rtlCol="0" anchor="ctr"/>
@@ -10982,7 +10956,7 @@
               <a:buNone/>
             </a:pPr>
             <a:r>
-              <a:rPr lang="en-US" sz="900" dirty="0">
+              <a:rPr lang="en-US" sz="900" b="1" dirty="0">
                 <a:solidFill>
                   <a:srgbClr val="17324D"/>
                 </a:solidFill>
@@ -10998,7 +10972,7 @@
       </p:sp>
       <p:sp>
         <p:nvSpPr>
-          <p:cNvPr id="22" name="Shape 20"/>
+          <p:cNvPr id="21" name="Text 19"/>
           <p:cNvSpPr/>
           <p:nvPr/>
         </p:nvSpPr>
@@ -11019,33 +10993,7 @@
             <a:solidFill>
               <a:srgbClr val="D6DBDF"/>
             </a:solidFill>
-            <a:prstDash val="solid"/>
           </a:ln>
-          <a:effectLst>
-            <a:outerShdw sx="100000" sy="100000" kx="0" ky="0" algn="bl" rotWithShape="0" blurRad="50800" dist="12700" dir="5400000">
-              <a:srgbClr val="1C2E42">
-                <a:alpha val="10000"/>
-              </a:srgbClr>
-            </a:outerShdw>
-          </a:effectLst>
-        </p:spPr>
-      </p:sp>
-      <p:sp>
-        <p:nvSpPr>
-          <p:cNvPr id="23" name="Text 21"/>
-          <p:cNvSpPr/>
-          <p:nvPr/>
-        </p:nvSpPr>
-        <p:spPr>
-          <a:xfrm>
-            <a:off x="2453640" y="1481328"/>
-            <a:ext cx="1447800" cy="384048"/>
-          </a:xfrm>
-          <a:prstGeom prst="rect">
-            <a:avLst/>
-          </a:prstGeom>
-          <a:noFill/>
-          <a:ln/>
         </p:spPr>
         <p:txBody>
           <a:bodyPr wrap="square" rtlCol="0" anchor="ctr"/>
@@ -11055,7 +11003,7 @@
               <a:buNone/>
             </a:pPr>
             <a:r>
-              <a:rPr lang="en-US" sz="900" dirty="0">
+              <a:rPr lang="en-US" sz="900" b="1" dirty="0">
                 <a:solidFill>
                   <a:srgbClr val="17324D"/>
                 </a:solidFill>
@@ -11071,7 +11019,7 @@
       </p:sp>
       <p:sp>
         <p:nvSpPr>
-          <p:cNvPr id="24" name="Shape 22"/>
+          <p:cNvPr id="22" name="Text 20"/>
           <p:cNvSpPr/>
           <p:nvPr/>
         </p:nvSpPr>
@@ -11092,33 +11040,7 @@
             <a:solidFill>
               <a:srgbClr val="D6DBDF"/>
             </a:solidFill>
-            <a:prstDash val="solid"/>
           </a:ln>
-          <a:effectLst>
-            <a:outerShdw sx="100000" sy="100000" kx="0" ky="0" algn="bl" rotWithShape="0" blurRad="50800" dist="12700" dir="5400000">
-              <a:srgbClr val="1C2E42">
-                <a:alpha val="10000"/>
-              </a:srgbClr>
-            </a:outerShdw>
-          </a:effectLst>
-        </p:spPr>
-      </p:sp>
-      <p:sp>
-        <p:nvSpPr>
-          <p:cNvPr id="25" name="Text 23"/>
-          <p:cNvSpPr/>
-          <p:nvPr/>
-        </p:nvSpPr>
-        <p:spPr>
-          <a:xfrm>
-            <a:off x="4221480" y="1481328"/>
-            <a:ext cx="1447800" cy="384048"/>
-          </a:xfrm>
-          <a:prstGeom prst="rect">
-            <a:avLst/>
-          </a:prstGeom>
-          <a:noFill/>
-          <a:ln/>
         </p:spPr>
         <p:txBody>
           <a:bodyPr wrap="square" rtlCol="0" anchor="ctr"/>
@@ -11128,7 +11050,7 @@
               <a:buNone/>
             </a:pPr>
             <a:r>
-              <a:rPr lang="en-US" sz="900" dirty="0">
+              <a:rPr lang="en-US" sz="900" b="1" dirty="0">
                 <a:solidFill>
                   <a:srgbClr val="17324D"/>
                 </a:solidFill>
@@ -11144,7 +11066,7 @@
       </p:sp>
       <p:sp>
         <p:nvSpPr>
-          <p:cNvPr id="26" name="Shape 24"/>
+          <p:cNvPr id="23" name="Text 21"/>
           <p:cNvSpPr/>
           <p:nvPr/>
         </p:nvSpPr>
@@ -11165,33 +11087,7 @@
             <a:solidFill>
               <a:srgbClr val="D6DBDF"/>
             </a:solidFill>
-            <a:prstDash val="solid"/>
           </a:ln>
-          <a:effectLst>
-            <a:outerShdw sx="100000" sy="100000" kx="0" ky="0" algn="bl" rotWithShape="0" blurRad="50800" dist="12700" dir="5400000">
-              <a:srgbClr val="1C2E42">
-                <a:alpha val="10000"/>
-              </a:srgbClr>
-            </a:outerShdw>
-          </a:effectLst>
-        </p:spPr>
-      </p:sp>
-      <p:sp>
-        <p:nvSpPr>
-          <p:cNvPr id="27" name="Text 25"/>
-          <p:cNvSpPr/>
-          <p:nvPr/>
-        </p:nvSpPr>
-        <p:spPr>
-          <a:xfrm>
-            <a:off x="685800" y="1975104"/>
-            <a:ext cx="1447800" cy="384048"/>
-          </a:xfrm>
-          <a:prstGeom prst="rect">
-            <a:avLst/>
-          </a:prstGeom>
-          <a:noFill/>
-          <a:ln/>
         </p:spPr>
         <p:txBody>
           <a:bodyPr wrap="square" rtlCol="0" anchor="ctr"/>
@@ -11201,7 +11097,7 @@
               <a:buNone/>
             </a:pPr>
             <a:r>
-              <a:rPr lang="en-US" sz="900" dirty="0">
+              <a:rPr lang="en-US" sz="900" b="1" dirty="0">
                 <a:solidFill>
                   <a:srgbClr val="17324D"/>
                 </a:solidFill>
@@ -11217,7 +11113,7 @@
       </p:sp>
       <p:sp>
         <p:nvSpPr>
-          <p:cNvPr id="28" name="Shape 26"/>
+          <p:cNvPr id="24" name="Text 22"/>
           <p:cNvSpPr/>
           <p:nvPr/>
         </p:nvSpPr>
@@ -11238,33 +11134,7 @@
             <a:solidFill>
               <a:srgbClr val="D6DBDF"/>
             </a:solidFill>
-            <a:prstDash val="solid"/>
           </a:ln>
-          <a:effectLst>
-            <a:outerShdw sx="100000" sy="100000" kx="0" ky="0" algn="bl" rotWithShape="0" blurRad="50800" dist="12700" dir="5400000">
-              <a:srgbClr val="1C2E42">
-                <a:alpha val="10000"/>
-              </a:srgbClr>
-            </a:outerShdw>
-          </a:effectLst>
-        </p:spPr>
-      </p:sp>
-      <p:sp>
-        <p:nvSpPr>
-          <p:cNvPr id="29" name="Text 27"/>
-          <p:cNvSpPr/>
-          <p:nvPr/>
-        </p:nvSpPr>
-        <p:spPr>
-          <a:xfrm>
-            <a:off x="2453640" y="1975104"/>
-            <a:ext cx="1447800" cy="384048"/>
-          </a:xfrm>
-          <a:prstGeom prst="rect">
-            <a:avLst/>
-          </a:prstGeom>
-          <a:noFill/>
-          <a:ln/>
         </p:spPr>
         <p:txBody>
           <a:bodyPr wrap="square" rtlCol="0" anchor="ctr"/>
@@ -11274,7 +11144,7 @@
               <a:buNone/>
             </a:pPr>
             <a:r>
-              <a:rPr lang="en-US" sz="900" dirty="0">
+              <a:rPr lang="en-US" sz="900" b="1" dirty="0">
                 <a:solidFill>
                   <a:srgbClr val="17324D"/>
                 </a:solidFill>
@@ -11290,7 +11160,7 @@
       </p:sp>
       <p:sp>
         <p:nvSpPr>
-          <p:cNvPr id="30" name="Shape 28"/>
+          <p:cNvPr id="25" name="Text 23"/>
           <p:cNvSpPr/>
           <p:nvPr/>
         </p:nvSpPr>
@@ -11311,33 +11181,7 @@
             <a:solidFill>
               <a:srgbClr val="D6DBDF"/>
             </a:solidFill>
-            <a:prstDash val="solid"/>
           </a:ln>
-          <a:effectLst>
-            <a:outerShdw sx="100000" sy="100000" kx="0" ky="0" algn="bl" rotWithShape="0" blurRad="50800" dist="12700" dir="5400000">
-              <a:srgbClr val="1C2E42">
-                <a:alpha val="10000"/>
-              </a:srgbClr>
-            </a:outerShdw>
-          </a:effectLst>
-        </p:spPr>
-      </p:sp>
-      <p:sp>
-        <p:nvSpPr>
-          <p:cNvPr id="31" name="Text 29"/>
-          <p:cNvSpPr/>
-          <p:nvPr/>
-        </p:nvSpPr>
-        <p:spPr>
-          <a:xfrm>
-            <a:off x="4221480" y="1975104"/>
-            <a:ext cx="1447800" cy="384048"/>
-          </a:xfrm>
-          <a:prstGeom prst="rect">
-            <a:avLst/>
-          </a:prstGeom>
-          <a:noFill/>
-          <a:ln/>
         </p:spPr>
         <p:txBody>
           <a:bodyPr wrap="square" rtlCol="0" anchor="ctr"/>
@@ -11347,7 +11191,7 @@
               <a:buNone/>
             </a:pPr>
             <a:r>
-              <a:rPr lang="en-US" sz="900" dirty="0">
+              <a:rPr lang="en-US" sz="900" b="1" dirty="0">
                 <a:solidFill>
                   <a:srgbClr val="17324D"/>
                 </a:solidFill>
@@ -11363,7 +11207,7 @@
       </p:sp>
       <p:sp>
         <p:nvSpPr>
-          <p:cNvPr id="32" name="Shape 30"/>
+          <p:cNvPr id="26" name="Shape 24"/>
           <p:cNvSpPr/>
           <p:nvPr/>
         </p:nvSpPr>
@@ -11397,7 +11241,7 @@
       </p:sp>
       <p:sp>
         <p:nvSpPr>
-          <p:cNvPr id="33" name="Text 31"/>
+          <p:cNvPr id="27" name="Text 25"/>
           <p:cNvSpPr/>
           <p:nvPr/>
         </p:nvSpPr>
@@ -11438,7 +11282,7 @@
       </p:sp>
       <p:sp>
         <p:nvSpPr>
-          <p:cNvPr id="34" name="Shape 32"/>
+          <p:cNvPr id="28" name="Shape 26"/>
           <p:cNvSpPr/>
           <p:nvPr/>
         </p:nvSpPr>
@@ -11472,7 +11316,7 @@
       </p:sp>
       <p:sp>
         <p:nvSpPr>
-          <p:cNvPr id="35" name="Text 33"/>
+          <p:cNvPr id="29" name="Text 27"/>
           <p:cNvSpPr/>
           <p:nvPr/>
         </p:nvSpPr>
@@ -11513,7 +11357,7 @@
       </p:sp>
       <p:sp>
         <p:nvSpPr>
-          <p:cNvPr id="36" name="Shape 34"/>
+          <p:cNvPr id="30" name="Shape 28"/>
           <p:cNvSpPr/>
           <p:nvPr/>
         </p:nvSpPr>
@@ -11547,7 +11391,7 @@
       </p:sp>
       <p:sp>
         <p:nvSpPr>
-          <p:cNvPr id="37" name="Text 35"/>
+          <p:cNvPr id="31" name="Text 29"/>
           <p:cNvSpPr/>
           <p:nvPr/>
         </p:nvSpPr>
@@ -11588,7 +11432,7 @@
       </p:sp>
       <p:sp>
         <p:nvSpPr>
-          <p:cNvPr id="38" name="Shape 36"/>
+          <p:cNvPr id="32" name="Shape 30"/>
           <p:cNvSpPr/>
           <p:nvPr/>
         </p:nvSpPr>
@@ -11622,7 +11466,7 @@
       </p:sp>
       <p:sp>
         <p:nvSpPr>
-          <p:cNvPr id="39" name="Text 37"/>
+          <p:cNvPr id="33" name="Text 31"/>
           <p:cNvSpPr/>
           <p:nvPr/>
         </p:nvSpPr>
@@ -11663,7 +11507,7 @@
       </p:sp>
       <p:sp>
         <p:nvSpPr>
-          <p:cNvPr id="40" name="Text 38"/>
+          <p:cNvPr id="34" name="Text 32"/>
           <p:cNvSpPr/>
           <p:nvPr/>
         </p:nvSpPr>
@@ -11702,7 +11546,7 @@
       </p:sp>
       <p:sp>
         <p:nvSpPr>
-          <p:cNvPr id="41" name="Shape 39"/>
+          <p:cNvPr id="35" name="Shape 33"/>
           <p:cNvSpPr/>
           <p:nvPr/>
         </p:nvSpPr>
@@ -11725,7 +11569,7 @@
       </p:sp>
       <p:sp>
         <p:nvSpPr>
-          <p:cNvPr id="42" name="Shape 40"/>
+          <p:cNvPr id="36" name="Shape 34"/>
           <p:cNvSpPr/>
           <p:nvPr/>
         </p:nvSpPr>
@@ -11748,7 +11592,7 @@
       </p:sp>
       <p:sp>
         <p:nvSpPr>
-          <p:cNvPr id="43" name="Shape 41"/>
+          <p:cNvPr id="37" name="Shape 35"/>
           <p:cNvSpPr/>
           <p:nvPr/>
         </p:nvSpPr>
@@ -11771,7 +11615,7 @@
       </p:sp>
       <p:sp>
         <p:nvSpPr>
-          <p:cNvPr id="44" name="Shape 42"/>
+          <p:cNvPr id="38" name="Shape 36"/>
           <p:cNvSpPr/>
           <p:nvPr/>
         </p:nvSpPr>
@@ -11794,7 +11638,7 @@
       </p:sp>
       <p:sp>
         <p:nvSpPr>
-          <p:cNvPr id="45" name="Shape 43"/>
+          <p:cNvPr id="39" name="Shape 37"/>
           <p:cNvSpPr/>
           <p:nvPr/>
         </p:nvSpPr>

--- a/lessons/6-3/slides.pptx
+++ b/lessons/6-3/slides.pptx
@@ -2495,7 +2495,7 @@
                 <a:ea typeface="Outfit" pitchFamily="34" charset="-122"/>
                 <a:cs typeface="Outfit" pitchFamily="34" charset="-120"/>
               </a:rPr>
-              <a:t>6.EE.2a</a:t>
+              <a:t>6.AT.6a</a:t>
             </a:r>
             <a:endParaRPr lang="en-US" sz="1000" dirty="0"/>
           </a:p>
@@ -3218,7 +3218,7 @@
                 <a:ea typeface="Outfit" pitchFamily="34" charset="-122"/>
                 <a:cs typeface="Outfit" pitchFamily="34" charset="-120"/>
               </a:rPr>
-              <a:t>6.EE.2a</a:t>
+              <a:t>6.AT.6a</a:t>
             </a:r>
             <a:endParaRPr lang="en-US" sz="900" dirty="0"/>
           </a:p>
@@ -4497,7 +4497,7 @@
                 <a:ea typeface="Outfit" pitchFamily="34" charset="-122"/>
                 <a:cs typeface="Outfit" pitchFamily="34" charset="-120"/>
               </a:rPr>
-              <a:t>6.EE.2a</a:t>
+              <a:t>6.AT.6a</a:t>
             </a:r>
             <a:endParaRPr lang="en-US" sz="900" dirty="0"/>
           </a:p>
@@ -5766,7 +5766,7 @@
                 <a:ea typeface="Outfit" pitchFamily="34" charset="-122"/>
                 <a:cs typeface="Outfit" pitchFamily="34" charset="-120"/>
               </a:rPr>
-              <a:t>6.EE.2a</a:t>
+              <a:t>6.AT.6a</a:t>
             </a:r>
             <a:endParaRPr lang="en-US" sz="900" dirty="0"/>
           </a:p>
@@ -6962,7 +6962,7 @@
                 <a:ea typeface="Outfit" pitchFamily="34" charset="-122"/>
                 <a:cs typeface="Outfit" pitchFamily="34" charset="-120"/>
               </a:rPr>
-              <a:t>6.EE.2a</a:t>
+              <a:t>6.AT.6a</a:t>
             </a:r>
             <a:endParaRPr lang="en-US" sz="900" dirty="0"/>
           </a:p>
@@ -8024,7 +8024,7 @@
                 <a:ea typeface="Outfit" pitchFamily="34" charset="-122"/>
                 <a:cs typeface="Outfit" pitchFamily="34" charset="-120"/>
               </a:rPr>
-              <a:t>6.EE.2a</a:t>
+              <a:t>6.AT.6a</a:t>
             </a:r>
             <a:endParaRPr lang="en-US" sz="900" dirty="0"/>
           </a:p>
@@ -8989,7 +8989,7 @@
                 <a:ea typeface="Outfit" pitchFamily="34" charset="-122"/>
                 <a:cs typeface="Outfit" pitchFamily="34" charset="-120"/>
               </a:rPr>
-              <a:t>6.EE.2a</a:t>
+              <a:t>6.AT.6a</a:t>
             </a:r>
             <a:endParaRPr lang="en-US" sz="900" dirty="0"/>
           </a:p>
@@ -9906,7 +9906,7 @@
                 <a:ea typeface="Outfit" pitchFamily="34" charset="-122"/>
                 <a:cs typeface="Outfit" pitchFamily="34" charset="-120"/>
               </a:rPr>
-              <a:t>6.EE.2a</a:t>
+              <a:t>6.AT.6a</a:t>
             </a:r>
             <a:endParaRPr lang="en-US" sz="900" dirty="0"/>
           </a:p>
@@ -11034,7 +11034,7 @@
                 <a:ea typeface="Outfit" pitchFamily="34" charset="-122"/>
                 <a:cs typeface="Outfit" pitchFamily="34" charset="-120"/>
               </a:rPr>
-              <a:t>6.EE.2a</a:t>
+              <a:t>6.AT.6a</a:t>
             </a:r>
             <a:endParaRPr lang="en-US" sz="900" dirty="0"/>
           </a:p>
@@ -12467,7 +12467,7 @@
                 <a:ea typeface="Outfit" pitchFamily="34" charset="-122"/>
                 <a:cs typeface="Outfit" pitchFamily="34" charset="-120"/>
               </a:rPr>
-              <a:t>6.EE.2a</a:t>
+              <a:t>6.AT.6a</a:t>
             </a:r>
             <a:endParaRPr lang="en-US" sz="900" dirty="0"/>
           </a:p>
@@ -13281,7 +13281,7 @@
                 <a:ea typeface="Outfit" pitchFamily="34" charset="-122"/>
                 <a:cs typeface="Outfit" pitchFamily="34" charset="-120"/>
               </a:rPr>
-              <a:t>6.EE.2a</a:t>
+              <a:t>6.AT.6a</a:t>
             </a:r>
             <a:endParaRPr lang="en-US" sz="900" dirty="0"/>
           </a:p>
@@ -14341,7 +14341,7 @@
                 <a:ea typeface="Outfit" pitchFamily="34" charset="-122"/>
                 <a:cs typeface="Outfit" pitchFamily="34" charset="-120"/>
               </a:rPr>
-              <a:t>6.EE.2a</a:t>
+              <a:t>6.AT.6a</a:t>
             </a:r>
             <a:endParaRPr lang="en-US" sz="900" dirty="0"/>
           </a:p>
@@ -15401,7 +15401,7 @@
                 <a:ea typeface="Outfit" pitchFamily="34" charset="-122"/>
                 <a:cs typeface="Outfit" pitchFamily="34" charset="-120"/>
               </a:rPr>
-              <a:t>6.EE.2a</a:t>
+              <a:t>6.AT.6a</a:t>
             </a:r>
             <a:endParaRPr lang="en-US" sz="900" dirty="0"/>
           </a:p>
@@ -16461,7 +16461,7 @@
                 <a:ea typeface="Outfit" pitchFamily="34" charset="-122"/>
                 <a:cs typeface="Outfit" pitchFamily="34" charset="-120"/>
               </a:rPr>
-              <a:t>6.EE.2a</a:t>
+              <a:t>6.AT.6a</a:t>
             </a:r>
             <a:endParaRPr lang="en-US" sz="900" dirty="0"/>
           </a:p>
@@ -17521,7 +17521,7 @@
                 <a:ea typeface="Outfit" pitchFamily="34" charset="-122"/>
                 <a:cs typeface="Outfit" pitchFamily="34" charset="-120"/>
               </a:rPr>
-              <a:t>6.EE.2a</a:t>
+              <a:t>6.AT.6a</a:t>
             </a:r>
             <a:endParaRPr lang="en-US" sz="900" dirty="0"/>
           </a:p>
@@ -18509,7 +18509,7 @@
                 <a:ea typeface="Outfit" pitchFamily="34" charset="-122"/>
                 <a:cs typeface="Outfit" pitchFamily="34" charset="-120"/>
               </a:rPr>
-              <a:t>6.EE.2a</a:t>
+              <a:t>6.AT.6a</a:t>
             </a:r>
             <a:endParaRPr lang="en-US" sz="900" dirty="0"/>
           </a:p>
@@ -20688,7 +20688,7 @@
                 <a:ea typeface="Outfit" pitchFamily="34" charset="-122"/>
                 <a:cs typeface="Outfit" pitchFamily="34" charset="-120"/>
               </a:rPr>
-              <a:t>6.EE.2a</a:t>
+              <a:t>6.AT.6a</a:t>
             </a:r>
             <a:endParaRPr lang="en-US" sz="900" dirty="0"/>
           </a:p>

--- a/lessons/6-3/slides.pptx
+++ b/lessons/6-3/slides.pptx
@@ -694,7 +694,7 @@
           <a:p>
             <a:r>
               <a:rPr lang="en-US" dirty="0"/>
-              <a:t>Answer key — '12 less than a number g' means start with g and subtract 12: g − 12. The phrase 'less than' reverses the order — the number being subtracted FROM comes after 'less than.'</a:t>
+              <a:t>Answer key — 2³ means 2 × 2 × 2, NOT 2 × 3. The exponent tells us to multiply the base by itself 3 times: 2 × 2 × 2 = 8.</a:t>
             </a:r>
             <a:endParaRPr lang="en-US" dirty="0"/>
           </a:p>
@@ -2452,7 +2452,7 @@
                 <a:ea typeface="Outfit" pitchFamily="34" charset="-122"/>
                 <a:cs typeface="Outfit" pitchFamily="34" charset="-120"/>
               </a:rPr>
-              <a:t>Write Algebraic Expressions</a:t>
+              <a:t>Powers and Exponents</a:t>
             </a:r>
             <a:endParaRPr lang="en-US" sz="3000" dirty="0"/>
           </a:p>
@@ -2495,7 +2495,7 @@
                 <a:ea typeface="Outfit" pitchFamily="34" charset="-122"/>
                 <a:cs typeface="Outfit" pitchFamily="34" charset="-120"/>
               </a:rPr>
-              <a:t>6.AT.6a</a:t>
+              <a:t>6.AT.5</a:t>
             </a:r>
             <a:endParaRPr lang="en-US" sz="1000" dirty="0"/>
           </a:p>
@@ -2534,7 +2534,7 @@
                 <a:ea typeface="Hanken Grotesk" pitchFamily="34" charset="-122"/>
                 <a:cs typeface="Hanken Grotesk" pitchFamily="34" charset="-120"/>
               </a:rPr>
-              <a:t>Unit 6  ·  Lesson 6-3</a:t>
+              <a:t>Unit 6  ·  Lesson 6-1</a:t>
             </a:r>
             <a:endParaRPr lang="en-US" sz="1000" dirty="0"/>
           </a:p>
@@ -2919,7 +2919,7 @@
                 <a:ea typeface="Hanken Grotesk" pitchFamily="34" charset="-122"/>
                 <a:cs typeface="Hanken Grotesk" pitchFamily="34" charset="-120"/>
               </a:rPr>
-              <a:t>I can write algebraic expressions from words and real-world situations.</a:t>
+              <a:t>I can write and evaluate numbers in exponent form using a base and a power.</a:t>
             </a:r>
             <a:endParaRPr lang="en-US" sz="1100" dirty="0"/>
           </a:p>
@@ -3045,7 +3045,7 @@
                 <a:ea typeface="Hanken Grotesk" pitchFamily="34" charset="-122"/>
                 <a:cs typeface="Hanken Grotesk" pitchFamily="34" charset="-120"/>
               </a:rPr>
-              <a:t>I can explain my expression using the words variable, coefficient, constant, and algebraic expression.</a:t>
+              <a:t>I can explain my work using the words exponent, base, power, and evaluate.</a:t>
             </a:r>
             <a:endParaRPr lang="en-US" sz="1050" dirty="0"/>
           </a:p>
@@ -3218,7 +3218,7 @@
                 <a:ea typeface="Outfit" pitchFamily="34" charset="-122"/>
                 <a:cs typeface="Outfit" pitchFamily="34" charset="-120"/>
               </a:rPr>
-              <a:t>6.AT.6a</a:t>
+              <a:t>6.AT.5</a:t>
             </a:r>
             <a:endParaRPr lang="en-US" sz="900" dirty="0"/>
           </a:p>
@@ -3437,7 +3437,7 @@
                 <a:ea typeface="Hanken Grotesk" pitchFamily="34" charset="-122"/>
                 <a:cs typeface="Hanken Grotesk" pitchFamily="34" charset="-120"/>
               </a:rPr>
-              <a:t>Reveal Math Grade 6  ·  Unit 6  ·  Lesson 6-3</a:t>
+              <a:t>Reveal Math Grade 6  ·  Unit 6  ·  Lesson 6-1</a:t>
             </a:r>
             <a:endParaRPr lang="en-US" sz="750" dirty="0"/>
           </a:p>
@@ -3549,7 +3549,7 @@
                 <a:ea typeface="Outfit" pitchFamily="34" charset="-122"/>
                 <a:cs typeface="Outfit" pitchFamily="34" charset="-120"/>
               </a:rPr>
-              <a:t>Read each word phrase and sort it into the correct algebraic expression.</a:t>
+              <a:t>Evaluate each exponential expression. Write the repeated multiplication and find the value.</a:t>
             </a:r>
             <a:endParaRPr lang="en-US" sz="1050" dirty="0"/>
           </a:p>
@@ -3635,7 +3635,7 @@
                 <a:ea typeface="Hanken Grotesk" pitchFamily="34" charset="-122"/>
                 <a:cs typeface="Hanken Grotesk" pitchFamily="34" charset="-120"/>
               </a:rPr>
-              <a:t>5 more than a number n → n + 5</a:t>
+              <a:t>Card 1</a:t>
             </a:r>
             <a:endParaRPr lang="en-US" sz="900" dirty="0"/>
           </a:p>
@@ -3682,7 +3682,7 @@
                 <a:ea typeface="Hanken Grotesk" pitchFamily="34" charset="-122"/>
                 <a:cs typeface="Hanken Grotesk" pitchFamily="34" charset="-120"/>
               </a:rPr>
-              <a:t>the sum of 12 and a number x → 12 + x</a:t>
+              <a:t>Card 2</a:t>
             </a:r>
             <a:endParaRPr lang="en-US" sz="900" dirty="0"/>
           </a:p>
@@ -3729,7 +3729,7 @@
                 <a:ea typeface="Hanken Grotesk" pitchFamily="34" charset="-122"/>
                 <a:cs typeface="Hanken Grotesk" pitchFamily="34" charset="-120"/>
               </a:rPr>
-              <a:t>a number y increased by 8 → y + 8</a:t>
+              <a:t>Card 3</a:t>
             </a:r>
             <a:endParaRPr lang="en-US" sz="900" dirty="0"/>
           </a:p>
@@ -3776,7 +3776,7 @@
                 <a:ea typeface="Hanken Grotesk" pitchFamily="34" charset="-122"/>
                 <a:cs typeface="Hanken Grotesk" pitchFamily="34" charset="-120"/>
               </a:rPr>
-              <a:t>7 less than a number p → p − 7</a:t>
+              <a:t>Card 4</a:t>
             </a:r>
             <a:endParaRPr lang="en-US" sz="900" dirty="0"/>
           </a:p>
@@ -3784,112 +3784,18 @@
       </p:sp>
       <p:sp>
         <p:nvSpPr>
-          <p:cNvPr id="24" name="Text 22"/>
-          <p:cNvSpPr/>
-          <p:nvPr/>
-        </p:nvSpPr>
-        <p:spPr>
-          <a:xfrm>
-            <a:off x="2362200" y="1975104"/>
-            <a:ext cx="1630680" cy="384048"/>
+          <p:cNvPr id="24" name="Shape 22"/>
+          <p:cNvSpPr/>
+          <p:nvPr/>
+        </p:nvSpPr>
+        <p:spPr>
+          <a:xfrm>
+            <a:off x="594360" y="2560320"/>
+            <a:ext cx="2514600" cy="1965960"/>
           </a:xfrm>
           <a:prstGeom prst="roundRect">
             <a:avLst>
-              <a:gd name="adj" fmla="val 11905"/>
-            </a:avLst>
-          </a:prstGeom>
-          <a:solidFill>
-            <a:srgbClr val="FBEFD0"/>
-          </a:solidFill>
-          <a:ln w="12700">
-            <a:solidFill>
-              <a:srgbClr val="D6DBDF"/>
-            </a:solidFill>
-          </a:ln>
-        </p:spPr>
-        <p:txBody>
-          <a:bodyPr wrap="square" rtlCol="0" anchor="ctr"/>
-          <a:lstStyle/>
-          <a:p>
-            <a:pPr algn="ctr" indent="0" marL="0">
-              <a:buNone/>
-            </a:pPr>
-            <a:r>
-              <a:rPr lang="en-US" sz="900" b="1" dirty="0">
-                <a:solidFill>
-                  <a:srgbClr val="17324D"/>
-                </a:solidFill>
-                <a:latin typeface="Hanken Grotesk" pitchFamily="34" charset="0"/>
-                <a:ea typeface="Hanken Grotesk" pitchFamily="34" charset="-122"/>
-                <a:cs typeface="Hanken Grotesk" pitchFamily="34" charset="-120"/>
-              </a:rPr>
-              <a:t>a number w decreased by 3 → w − 3</a:t>
-            </a:r>
-            <a:endParaRPr lang="en-US" sz="900" dirty="0"/>
-          </a:p>
-        </p:txBody>
-      </p:sp>
-      <p:sp>
-        <p:nvSpPr>
-          <p:cNvPr id="25" name="Text 23"/>
-          <p:cNvSpPr/>
-          <p:nvPr/>
-        </p:nvSpPr>
-        <p:spPr>
-          <a:xfrm>
-            <a:off x="4130040" y="1975104"/>
-            <a:ext cx="1630680" cy="384048"/>
-          </a:xfrm>
-          <a:prstGeom prst="roundRect">
-            <a:avLst>
-              <a:gd name="adj" fmla="val 11905"/>
-            </a:avLst>
-          </a:prstGeom>
-          <a:solidFill>
-            <a:srgbClr val="FBEFD0"/>
-          </a:solidFill>
-          <a:ln w="12700">
-            <a:solidFill>
-              <a:srgbClr val="D6DBDF"/>
-            </a:solidFill>
-          </a:ln>
-        </p:spPr>
-        <p:txBody>
-          <a:bodyPr wrap="square" rtlCol="0" anchor="ctr"/>
-          <a:lstStyle/>
-          <a:p>
-            <a:pPr algn="ctr" indent="0" marL="0">
-              <a:buNone/>
-            </a:pPr>
-            <a:r>
-              <a:rPr lang="en-US" sz="900" b="1" dirty="0">
-                <a:solidFill>
-                  <a:srgbClr val="17324D"/>
-                </a:solidFill>
-                <a:latin typeface="Hanken Grotesk" pitchFamily="34" charset="0"/>
-                <a:ea typeface="Hanken Grotesk" pitchFamily="34" charset="-122"/>
-                <a:cs typeface="Hanken Grotesk" pitchFamily="34" charset="-120"/>
-              </a:rPr>
-              <a:t>the product of 4 and a number m → 4m</a:t>
-            </a:r>
-            <a:endParaRPr lang="en-US" sz="900" dirty="0"/>
-          </a:p>
-        </p:txBody>
-      </p:sp>
-      <p:sp>
-        <p:nvSpPr>
-          <p:cNvPr id="26" name="Shape 24"/>
-          <p:cNvSpPr/>
-          <p:nvPr/>
-        </p:nvSpPr>
-        <p:spPr>
-          <a:xfrm>
-            <a:off x="594360" y="2560320"/>
-            <a:ext cx="1630680" cy="1965960"/>
-          </a:xfrm>
-          <a:prstGeom prst="roundRect">
-            <a:avLst>
-              <a:gd name="adj" fmla="val 2804"/>
+              <a:gd name="adj" fmla="val 2326"/>
             </a:avLst>
           </a:prstGeom>
           <a:solidFill>
@@ -3912,14 +3818,14 @@
       </p:sp>
       <p:sp>
         <p:nvSpPr>
-          <p:cNvPr id="27" name="Text 25"/>
+          <p:cNvPr id="25" name="Text 23"/>
           <p:cNvSpPr/>
           <p:nvPr/>
         </p:nvSpPr>
         <p:spPr>
           <a:xfrm>
             <a:off x="594360" y="2560320"/>
-            <a:ext cx="1630680" cy="292608"/>
+            <a:ext cx="2514600" cy="292608"/>
           </a:xfrm>
           <a:prstGeom prst="rect">
             <a:avLst/>
@@ -3945,7 +3851,7 @@
                 <a:ea typeface="Outfit" pitchFamily="34" charset="-122"/>
                 <a:cs typeface="Outfit" pitchFamily="34" charset="-120"/>
               </a:rPr>
-              <a:t>Addition Expressions</a:t>
+              <a:t>Group A</a:t>
             </a:r>
             <a:endParaRPr lang="en-US" sz="950" dirty="0"/>
           </a:p>
@@ -3953,18 +3859,18 @@
       </p:sp>
       <p:sp>
         <p:nvSpPr>
-          <p:cNvPr id="28" name="Shape 26"/>
-          <p:cNvSpPr/>
-          <p:nvPr/>
-        </p:nvSpPr>
-        <p:spPr>
-          <a:xfrm>
-            <a:off x="2362200" y="2560320"/>
-            <a:ext cx="1630680" cy="1965960"/>
+          <p:cNvPr id="26" name="Shape 24"/>
+          <p:cNvSpPr/>
+          <p:nvPr/>
+        </p:nvSpPr>
+        <p:spPr>
+          <a:xfrm>
+            <a:off x="3246120" y="2560320"/>
+            <a:ext cx="2514600" cy="1965960"/>
           </a:xfrm>
           <a:prstGeom prst="roundRect">
             <a:avLst>
-              <a:gd name="adj" fmla="val 2804"/>
+              <a:gd name="adj" fmla="val 2326"/>
             </a:avLst>
           </a:prstGeom>
           <a:solidFill>
@@ -3987,14 +3893,14 @@
       </p:sp>
       <p:sp>
         <p:nvSpPr>
-          <p:cNvPr id="29" name="Text 27"/>
-          <p:cNvSpPr/>
-          <p:nvPr/>
-        </p:nvSpPr>
-        <p:spPr>
-          <a:xfrm>
-            <a:off x="2362200" y="2560320"/>
-            <a:ext cx="1630680" cy="292608"/>
+          <p:cNvPr id="27" name="Text 25"/>
+          <p:cNvSpPr/>
+          <p:nvPr/>
+        </p:nvSpPr>
+        <p:spPr>
+          <a:xfrm>
+            <a:off x="3246120" y="2560320"/>
+            <a:ext cx="2514600" cy="292608"/>
           </a:xfrm>
           <a:prstGeom prst="rect">
             <a:avLst/>
@@ -4020,7 +3926,7 @@
                 <a:ea typeface="Outfit" pitchFamily="34" charset="-122"/>
                 <a:cs typeface="Outfit" pitchFamily="34" charset="-120"/>
               </a:rPr>
-              <a:t>Subtraction Expressions</a:t>
+              <a:t>Group B</a:t>
             </a:r>
             <a:endParaRPr lang="en-US" sz="950" dirty="0"/>
           </a:p>
@@ -4028,82 +3934,7 @@
       </p:sp>
       <p:sp>
         <p:nvSpPr>
-          <p:cNvPr id="30" name="Shape 28"/>
-          <p:cNvSpPr/>
-          <p:nvPr/>
-        </p:nvSpPr>
-        <p:spPr>
-          <a:xfrm>
-            <a:off x="4130040" y="2560320"/>
-            <a:ext cx="1630680" cy="1965960"/>
-          </a:xfrm>
-          <a:prstGeom prst="roundRect">
-            <a:avLst>
-              <a:gd name="adj" fmla="val 2804"/>
-            </a:avLst>
-          </a:prstGeom>
-          <a:solidFill>
-            <a:srgbClr val="FFFFFF"/>
-          </a:solidFill>
-          <a:ln w="12700">
-            <a:solidFill>
-              <a:srgbClr val="7A5C8E"/>
-            </a:solidFill>
-            <a:prstDash val="solid"/>
-          </a:ln>
-          <a:effectLst>
-            <a:outerShdw sx="100000" sy="100000" kx="0" ky="0" algn="bl" rotWithShape="0" blurRad="50800" dist="12700" dir="5400000">
-              <a:srgbClr val="1C2E42">
-                <a:alpha val="10000"/>
-              </a:srgbClr>
-            </a:outerShdw>
-          </a:effectLst>
-        </p:spPr>
-      </p:sp>
-      <p:sp>
-        <p:nvSpPr>
-          <p:cNvPr id="31" name="Text 29"/>
-          <p:cNvSpPr/>
-          <p:nvPr/>
-        </p:nvSpPr>
-        <p:spPr>
-          <a:xfrm>
-            <a:off x="4130040" y="2560320"/>
-            <a:ext cx="1630680" cy="292608"/>
-          </a:xfrm>
-          <a:prstGeom prst="rect">
-            <a:avLst/>
-          </a:prstGeom>
-          <a:solidFill>
-            <a:srgbClr val="7A5C8E"/>
-          </a:solidFill>
-          <a:ln/>
-        </p:spPr>
-        <p:txBody>
-          <a:bodyPr wrap="square" rtlCol="0" anchor="ctr"/>
-          <a:lstStyle/>
-          <a:p>
-            <a:pPr algn="ctr" indent="0" marL="0">
-              <a:buNone/>
-            </a:pPr>
-            <a:r>
-              <a:rPr lang="en-US" sz="950" b="1" dirty="0">
-                <a:solidFill>
-                  <a:srgbClr val="FFFFFF"/>
-                </a:solidFill>
-                <a:latin typeface="Outfit" pitchFamily="34" charset="0"/>
-                <a:ea typeface="Outfit" pitchFamily="34" charset="-122"/>
-                <a:cs typeface="Outfit" pitchFamily="34" charset="-120"/>
-              </a:rPr>
-              <a:t>Multiplication Expressions</a:t>
-            </a:r>
-            <a:endParaRPr lang="en-US" sz="950" dirty="0"/>
-          </a:p>
-        </p:txBody>
-      </p:sp>
-      <p:sp>
-        <p:nvSpPr>
-          <p:cNvPr id="32" name="Shape 30"/>
+          <p:cNvPr id="28" name="Shape 26"/>
           <p:cNvSpPr/>
           <p:nvPr/>
         </p:nvSpPr>
@@ -4137,7 +3968,7 @@
       </p:sp>
       <p:sp>
         <p:nvSpPr>
-          <p:cNvPr id="33" name="Text 31"/>
+          <p:cNvPr id="29" name="Text 27"/>
           <p:cNvSpPr/>
           <p:nvPr/>
         </p:nvSpPr>
@@ -4178,7 +4009,7 @@
       </p:sp>
       <p:sp>
         <p:nvSpPr>
-          <p:cNvPr id="34" name="Text 32"/>
+          <p:cNvPr id="30" name="Text 28"/>
           <p:cNvSpPr/>
           <p:nvPr/>
         </p:nvSpPr>
@@ -4209,7 +4040,7 @@
                 <a:ea typeface="Hanken Grotesk" pitchFamily="34" charset="-122"/>
                 <a:cs typeface="Hanken Grotesk" pitchFamily="34" charset="-120"/>
               </a:rPr>
-              <a:t>How do you turn words into an expression? Why does '12 less than a number g' become g − 12 and not 12 − g?</a:t>
+              <a:t>Look at the table: when the exponent goes up by 1 (like from 2³ to 2⁴), what happens to the value, and why?</a:t>
             </a:r>
             <a:endParaRPr lang="en-US" sz="1000" dirty="0"/>
           </a:p>
@@ -4217,7 +4048,7 @@
       </p:sp>
       <p:sp>
         <p:nvSpPr>
-          <p:cNvPr id="35" name="Shape 33"/>
+          <p:cNvPr id="31" name="Shape 29"/>
           <p:cNvSpPr/>
           <p:nvPr/>
         </p:nvSpPr>
@@ -4240,7 +4071,7 @@
       </p:sp>
       <p:sp>
         <p:nvSpPr>
-          <p:cNvPr id="36" name="Shape 34"/>
+          <p:cNvPr id="32" name="Shape 30"/>
           <p:cNvSpPr/>
           <p:nvPr/>
         </p:nvSpPr>
@@ -4263,7 +4094,7 @@
       </p:sp>
       <p:sp>
         <p:nvSpPr>
-          <p:cNvPr id="37" name="Shape 35"/>
+          <p:cNvPr id="33" name="Shape 31"/>
           <p:cNvSpPr/>
           <p:nvPr/>
         </p:nvSpPr>
@@ -4286,7 +4117,7 @@
       </p:sp>
       <p:sp>
         <p:nvSpPr>
-          <p:cNvPr id="38" name="Shape 36"/>
+          <p:cNvPr id="34" name="Shape 32"/>
           <p:cNvSpPr/>
           <p:nvPr/>
         </p:nvSpPr>
@@ -4309,7 +4140,7 @@
       </p:sp>
       <p:sp>
         <p:nvSpPr>
-          <p:cNvPr id="39" name="Shape 37"/>
+          <p:cNvPr id="35" name="Shape 33"/>
           <p:cNvSpPr/>
           <p:nvPr/>
         </p:nvSpPr>
@@ -4497,7 +4328,7 @@
                 <a:ea typeface="Outfit" pitchFamily="34" charset="-122"/>
                 <a:cs typeface="Outfit" pitchFamily="34" charset="-120"/>
               </a:rPr>
-              <a:t>6.AT.6a</a:t>
+              <a:t>6.AT.5</a:t>
             </a:r>
             <a:endParaRPr lang="en-US" sz="900" dirty="0"/>
           </a:p>
@@ -4716,7 +4547,7 @@
                 <a:ea typeface="Hanken Grotesk" pitchFamily="34" charset="-122"/>
                 <a:cs typeface="Hanken Grotesk" pitchFamily="34" charset="-120"/>
               </a:rPr>
-              <a:t>Reveal Math Grade 6  ·  Unit 6  ·  Lesson 6-3</a:t>
+              <a:t>Reveal Math Grade 6  ·  Unit 6  ·  Lesson 6-1</a:t>
             </a:r>
             <a:endParaRPr lang="en-US" sz="750" dirty="0"/>
           </a:p>
@@ -4871,7 +4702,7 @@
                 <a:ea typeface="Outfit" pitchFamily="34" charset="-122"/>
                 <a:cs typeface="Outfit" pitchFamily="34" charset="-120"/>
               </a:rPr>
-              <a:t>Find the Translation Error</a:t>
+              <a:t>Find the Exponent Error</a:t>
             </a:r>
             <a:endParaRPr lang="en-US" sz="1100" dirty="0"/>
           </a:p>
@@ -5036,7 +4867,7 @@
                 <a:ea typeface="Hanken Grotesk" pitchFamily="34" charset="-122"/>
                 <a:cs typeface="Hanken Grotesk" pitchFamily="34" charset="-120"/>
               </a:rPr>
-              <a:t>Phrase:  </a:t>
+              <a:t>Expression:  </a:t>
             </a:r>
             <a:pPr indent="0" marL="0">
               <a:buNone/>
@@ -5050,7 +4881,7 @@
                 <a:ea typeface="Courier New" pitchFamily="34" charset="-122"/>
                 <a:cs typeface="Courier New" pitchFamily="34" charset="-120"/>
               </a:rPr>
-              <a:t>12 less than a number g</a:t>
+              <a:t>2³</a:t>
             </a:r>
             <a:endParaRPr lang="en-US" sz="950" dirty="0"/>
           </a:p>
@@ -5103,7 +4934,7 @@
                 <a:ea typeface="Hanken Grotesk" pitchFamily="34" charset="-122"/>
                 <a:cs typeface="Hanken Grotesk" pitchFamily="34" charset="-120"/>
               </a:rPr>
-              <a:t>Student's expression:  </a:t>
+              <a:t>Student's thinking:  </a:t>
             </a:r>
             <a:pPr indent="0" marL="0">
               <a:buNone/>
@@ -5117,7 +4948,7 @@
                 <a:ea typeface="Courier New" pitchFamily="34" charset="-122"/>
                 <a:cs typeface="Courier New" pitchFamily="34" charset="-120"/>
               </a:rPr>
-              <a:t>12 − g</a:t>
+              <a:t>2 × 3</a:t>
             </a:r>
             <a:endParaRPr lang="en-US" sz="950" dirty="0"/>
           </a:p>
@@ -5170,7 +5001,7 @@
                 <a:ea typeface="Hanken Grotesk" pitchFamily="34" charset="-122"/>
                 <a:cs typeface="Hanken Grotesk" pitchFamily="34" charset="-120"/>
               </a:rPr>
-              <a:t>Reasoning:  </a:t>
+              <a:t>Calculate:  </a:t>
             </a:r>
             <a:pPr indent="0" marL="0">
               <a:buNone/>
@@ -5184,7 +5015,7 @@
                 <a:ea typeface="Courier New" pitchFamily="34" charset="-122"/>
                 <a:cs typeface="Courier New" pitchFamily="34" charset="-120"/>
               </a:rPr>
-              <a:t>I see 'less than' so I subtract, and 12 comes first in the phrase.</a:t>
+              <a:t>= 6</a:t>
             </a:r>
             <a:endParaRPr lang="en-US" sz="950" dirty="0"/>
           </a:p>
@@ -5766,7 +5597,7 @@
                 <a:ea typeface="Outfit" pitchFamily="34" charset="-122"/>
                 <a:cs typeface="Outfit" pitchFamily="34" charset="-120"/>
               </a:rPr>
-              <a:t>6.AT.6a</a:t>
+              <a:t>6.AT.5</a:t>
             </a:r>
             <a:endParaRPr lang="en-US" sz="900" dirty="0"/>
           </a:p>
@@ -5985,7 +5816,7 @@
                 <a:ea typeface="Hanken Grotesk" pitchFamily="34" charset="-122"/>
                 <a:cs typeface="Hanken Grotesk" pitchFamily="34" charset="-120"/>
               </a:rPr>
-              <a:t>Reveal Math Grade 6  ·  Unit 6  ·  Lesson 6-3</a:t>
+              <a:t>Reveal Math Grade 6  ·  Unit 6  ·  Lesson 6-1</a:t>
             </a:r>
             <a:endParaRPr lang="en-US" sz="750" dirty="0"/>
           </a:p>
@@ -6197,7 +6028,7 @@
                 <a:ea typeface="Hanken Grotesk" pitchFamily="34" charset="-122"/>
                 <a:cs typeface="Hanken Grotesk" pitchFamily="34" charset="-120"/>
               </a:rPr>
-              <a:t>Tickets cost $12 each, plus a flat $50 venue fee. Let t be the number of tickets.</a:t>
+              <a:t>I want to find the value of 2³.</a:t>
             </a:r>
             <a:endParaRPr lang="en-US" sz="1050" dirty="0"/>
           </a:p>
@@ -6295,7 +6126,7 @@
                 <a:ea typeface="Hanken Grotesk" pitchFamily="34" charset="-122"/>
                 <a:cs typeface="Hanken Grotesk" pitchFamily="34" charset="-120"/>
               </a:rPr>
-              <a:t>"$12 each ticket" means 12 times t, which I write as 12t.</a:t>
+              <a:t>The small 3 tells me to multiply 2 by itself 3 times.</a:t>
             </a:r>
             <a:endParaRPr lang="en-US" sz="1050" dirty="0"/>
           </a:p>
@@ -6393,7 +6224,7 @@
                 <a:ea typeface="Hanken Grotesk" pitchFamily="34" charset="-122"/>
                 <a:cs typeface="Hanken Grotesk" pitchFamily="34" charset="-120"/>
               </a:rPr>
-              <a:t>The flat fee $50 is added once, so I add 50.</a:t>
+              <a:t>So I write 2 × 2 × 2.</a:t>
             </a:r>
             <a:endParaRPr lang="en-US" sz="1050" dirty="0"/>
           </a:p>
@@ -6491,7 +6322,7 @@
                 <a:ea typeface="Hanken Grotesk" pitchFamily="34" charset="-122"/>
                 <a:cs typeface="Hanken Grotesk" pitchFamily="34" charset="-120"/>
               </a:rPr>
-              <a:t>I put them together: total revenue = 12t + 50.</a:t>
+              <a:t>First 2 × 2 = 4. Then 4 × 2 = 8.</a:t>
             </a:r>
             <a:endParaRPr lang="en-US" sz="1050" dirty="0"/>
           </a:p>
@@ -6500,6 +6331,104 @@
       <p:sp>
         <p:nvSpPr>
           <p:cNvPr id="31" name="Shape 29"/>
+          <p:cNvSpPr/>
+          <p:nvPr/>
+        </p:nvSpPr>
+        <p:spPr>
+          <a:xfrm>
+            <a:off x="594360" y="3145536"/>
+            <a:ext cx="274320" cy="274320"/>
+          </a:xfrm>
+          <a:prstGeom prst="ellipse">
+            <a:avLst/>
+          </a:prstGeom>
+          <a:solidFill>
+            <a:srgbClr val="7A5C8E"/>
+          </a:solidFill>
+          <a:ln/>
+        </p:spPr>
+      </p:sp>
+      <p:sp>
+        <p:nvSpPr>
+          <p:cNvPr id="32" name="Text 30"/>
+          <p:cNvSpPr/>
+          <p:nvPr/>
+        </p:nvSpPr>
+        <p:spPr>
+          <a:xfrm>
+            <a:off x="594360" y="3145536"/>
+            <a:ext cx="274320" cy="274320"/>
+          </a:xfrm>
+          <a:prstGeom prst="rect">
+            <a:avLst/>
+          </a:prstGeom>
+          <a:noFill/>
+          <a:ln/>
+        </p:spPr>
+        <p:txBody>
+          <a:bodyPr wrap="square" rtlCol="0" anchor="ctr"/>
+          <a:lstStyle/>
+          <a:p>
+            <a:pPr algn="ctr" indent="0" marL="0">
+              <a:buNone/>
+            </a:pPr>
+            <a:r>
+              <a:rPr lang="en-US" sz="1100" b="1" dirty="0">
+                <a:solidFill>
+                  <a:srgbClr val="FFFFFF"/>
+                </a:solidFill>
+                <a:latin typeface="Outfit" pitchFamily="34" charset="0"/>
+                <a:ea typeface="Outfit" pitchFamily="34" charset="-122"/>
+                <a:cs typeface="Outfit" pitchFamily="34" charset="-120"/>
+              </a:rPr>
+              <a:t>5</a:t>
+            </a:r>
+            <a:endParaRPr lang="en-US" sz="1100" dirty="0"/>
+          </a:p>
+        </p:txBody>
+      </p:sp>
+      <p:sp>
+        <p:nvSpPr>
+          <p:cNvPr id="33" name="Text 31"/>
+          <p:cNvSpPr/>
+          <p:nvPr/>
+        </p:nvSpPr>
+        <p:spPr>
+          <a:xfrm>
+            <a:off x="978408" y="3090672"/>
+            <a:ext cx="3456432" cy="420624"/>
+          </a:xfrm>
+          <a:prstGeom prst="rect">
+            <a:avLst/>
+          </a:prstGeom>
+          <a:noFill/>
+          <a:ln/>
+        </p:spPr>
+        <p:txBody>
+          <a:bodyPr wrap="square" rtlCol="0" anchor="ctr"/>
+          <a:lstStyle/>
+          <a:p>
+            <a:pPr indent="0" marL="0">
+              <a:buNone/>
+            </a:pPr>
+            <a:r>
+              <a:rPr lang="en-US" sz="1050" dirty="0">
+                <a:solidFill>
+                  <a:srgbClr val="24323F"/>
+                </a:solidFill>
+                <a:latin typeface="Hanken Grotesk" pitchFamily="34" charset="0"/>
+                <a:ea typeface="Hanken Grotesk" pitchFamily="34" charset="-122"/>
+                <a:cs typeface="Hanken Grotesk" pitchFamily="34" charset="-120"/>
+              </a:rPr>
+              <a:t>So 2³ = 8.</a:t>
+            </a:r>
+            <a:endParaRPr lang="en-US" sz="1050" dirty="0"/>
+          </a:p>
+        </p:txBody>
+      </p:sp>
+      <p:sp>
+        <p:nvSpPr>
+          <p:cNvPr id="34" name="Shape 32"/>
           <p:cNvSpPr/>
           <p:nvPr/>
         </p:nvSpPr>
@@ -6533,7 +6462,7 @@
       </p:sp>
       <p:sp>
         <p:nvSpPr>
-          <p:cNvPr id="32" name="Text 30"/>
+          <p:cNvPr id="35" name="Text 33"/>
           <p:cNvSpPr/>
           <p:nvPr/>
         </p:nvSpPr>
@@ -6574,7 +6503,7 @@
       </p:sp>
       <p:sp>
         <p:nvSpPr>
-          <p:cNvPr id="33" name="Text 31"/>
+          <p:cNvPr id="36" name="Text 34"/>
           <p:cNvSpPr/>
           <p:nvPr/>
         </p:nvSpPr>
@@ -6613,7 +6542,7 @@
       </p:sp>
       <p:sp>
         <p:nvSpPr>
-          <p:cNvPr id="34" name="Shape 32"/>
+          <p:cNvPr id="37" name="Shape 35"/>
           <p:cNvSpPr/>
           <p:nvPr/>
         </p:nvSpPr>
@@ -6636,7 +6565,7 @@
       </p:sp>
       <p:sp>
         <p:nvSpPr>
-          <p:cNvPr id="35" name="Shape 33"/>
+          <p:cNvPr id="38" name="Shape 36"/>
           <p:cNvSpPr/>
           <p:nvPr/>
         </p:nvSpPr>
@@ -6659,7 +6588,7 @@
       </p:sp>
       <p:sp>
         <p:nvSpPr>
-          <p:cNvPr id="36" name="Shape 34"/>
+          <p:cNvPr id="39" name="Shape 37"/>
           <p:cNvSpPr/>
           <p:nvPr/>
         </p:nvSpPr>
@@ -6682,7 +6611,7 @@
       </p:sp>
       <p:sp>
         <p:nvSpPr>
-          <p:cNvPr id="37" name="Shape 35"/>
+          <p:cNvPr id="40" name="Shape 38"/>
           <p:cNvSpPr/>
           <p:nvPr/>
         </p:nvSpPr>
@@ -6705,7 +6634,7 @@
       </p:sp>
       <p:sp>
         <p:nvSpPr>
-          <p:cNvPr id="38" name="Shape 36"/>
+          <p:cNvPr id="41" name="Shape 39"/>
           <p:cNvSpPr/>
           <p:nvPr/>
         </p:nvSpPr>
@@ -6728,7 +6657,7 @@
       </p:sp>
       <p:sp>
         <p:nvSpPr>
-          <p:cNvPr id="39" name="Shape 37"/>
+          <p:cNvPr id="42" name="Shape 40"/>
           <p:cNvSpPr/>
           <p:nvPr/>
         </p:nvSpPr>
@@ -6751,7 +6680,7 @@
       </p:sp>
       <p:sp>
         <p:nvSpPr>
-          <p:cNvPr id="40" name="Shape 38"/>
+          <p:cNvPr id="43" name="Shape 41"/>
           <p:cNvSpPr/>
           <p:nvPr/>
         </p:nvSpPr>
@@ -6774,7 +6703,7 @@
       </p:sp>
       <p:sp>
         <p:nvSpPr>
-          <p:cNvPr id="41" name="Shape 39"/>
+          <p:cNvPr id="44" name="Shape 42"/>
           <p:cNvSpPr/>
           <p:nvPr/>
         </p:nvSpPr>
@@ -6962,7 +6891,7 @@
                 <a:ea typeface="Outfit" pitchFamily="34" charset="-122"/>
                 <a:cs typeface="Outfit" pitchFamily="34" charset="-120"/>
               </a:rPr>
-              <a:t>6.AT.6a</a:t>
+              <a:t>6.AT.5</a:t>
             </a:r>
             <a:endParaRPr lang="en-US" sz="900" dirty="0"/>
           </a:p>
@@ -7181,7 +7110,7 @@
                 <a:ea typeface="Hanken Grotesk" pitchFamily="34" charset="-122"/>
                 <a:cs typeface="Hanken Grotesk" pitchFamily="34" charset="-120"/>
               </a:rPr>
-              <a:t>Reveal Math Grade 6  ·  Unit 6  ·  Lesson 6-3</a:t>
+              <a:t>Reveal Math Grade 6  ·  Unit 6  ·  Lesson 6-1</a:t>
             </a:r>
             <a:endParaRPr lang="en-US" sz="750" dirty="0"/>
           </a:p>
@@ -7407,7 +7336,7 @@
                 <a:ea typeface="Hanken Grotesk" pitchFamily="34" charset="-122"/>
                 <a:cs typeface="Hanken Grotesk" pitchFamily="34" charset="-120"/>
               </a:rPr>
-              <a:t>Sketch a model for today's problem. Label it using Variable and Algebraic Expression.</a:t>
+              <a:t>Sketch a model for today's problem. Label it using Exponent and Base.</a:t>
             </a:r>
             <a:endParaRPr lang="en-US" sz="1000" dirty="0"/>
           </a:p>
@@ -7555,7 +7484,7 @@
                 <a:ea typeface="Hanken Grotesk" pitchFamily="34" charset="-122"/>
                 <a:cs typeface="Hanken Grotesk" pitchFamily="34" charset="-120"/>
               </a:rPr>
-              <a:t>In 2–3 sentences, explain "Words like "each" or "per" mean multiply, and "plus" or "more than" mean add." in your own words.</a:t>
+              <a:t>In 2–3 sentences, explain "A power like 2³ is a short way to write repeated multiplication: 2 × 2 × 2." in your own words.</a:t>
             </a:r>
             <a:endParaRPr lang="en-US" sz="1000" dirty="0"/>
           </a:p>
@@ -7851,7 +7780,7 @@
                 <a:ea typeface="Hanken Grotesk" pitchFamily="34" charset="-122"/>
                 <a:cs typeface="Hanken Grotesk" pitchFamily="34" charset="-120"/>
               </a:rPr>
-              <a:t>Write your own problem that uses Variable, then solve it and make an answer key.</a:t>
+              <a:t>Write your own problem that uses Exponent, then solve it and make an answer key.</a:t>
             </a:r>
             <a:endParaRPr lang="en-US" sz="1000" dirty="0"/>
           </a:p>
@@ -8024,7 +7953,7 @@
                 <a:ea typeface="Outfit" pitchFamily="34" charset="-122"/>
                 <a:cs typeface="Outfit" pitchFamily="34" charset="-120"/>
               </a:rPr>
-              <a:t>6.AT.6a</a:t>
+              <a:t>6.AT.5</a:t>
             </a:r>
             <a:endParaRPr lang="en-US" sz="900" dirty="0"/>
           </a:p>
@@ -8243,7 +8172,7 @@
                 <a:ea typeface="Hanken Grotesk" pitchFamily="34" charset="-122"/>
                 <a:cs typeface="Hanken Grotesk" pitchFamily="34" charset="-120"/>
               </a:rPr>
-              <a:t>Reveal Math Grade 6  ·  Unit 6  ·  Lesson 6-3</a:t>
+              <a:t>Reveal Math Grade 6  ·  Unit 6  ·  Lesson 6-1</a:t>
             </a:r>
             <a:endParaRPr lang="en-US" sz="750" dirty="0"/>
           </a:p>
@@ -8412,7 +8341,7 @@
                 <a:ea typeface="Hanken Grotesk" pitchFamily="34" charset="-122"/>
                 <a:cs typeface="Hanken Grotesk" pitchFamily="34" charset="-120"/>
               </a:rPr>
-              <a:t>Which expression represents 'the product of 6 and a number n'?</a:t>
+              <a:t>What is the value of 4³?</a:t>
             </a:r>
             <a:endParaRPr lang="en-US" sz="1050" dirty="0"/>
           </a:p>
@@ -8488,7 +8417,7 @@
                 <a:ea typeface="Hanken Grotesk" pitchFamily="34" charset="-122"/>
                 <a:cs typeface="Hanken Grotesk" pitchFamily="34" charset="-120"/>
               </a:rPr>
-              <a:t>Which expression represents '9 less than a number y'?</a:t>
+              <a:t>What is the value of 6²?</a:t>
             </a:r>
             <a:endParaRPr lang="en-US" sz="1050" dirty="0"/>
           </a:p>
@@ -8564,7 +8493,7 @@
                 <a:ea typeface="Hanken Grotesk" pitchFamily="34" charset="-122"/>
                 <a:cs typeface="Hanken Grotesk" pitchFamily="34" charset="-120"/>
               </a:rPr>
-              <a:t>Which expression represents 'the sum of a number m and 15'?</a:t>
+              <a:t>Which expression shows 5³ as repeated multiplication?</a:t>
             </a:r>
             <a:endParaRPr lang="en-US" sz="1050" dirty="0"/>
           </a:p>
@@ -8701,7 +8630,7 @@
                 <a:ea typeface="Hanken Grotesk" pitchFamily="34" charset="-122"/>
                 <a:cs typeface="Hanken Grotesk" pitchFamily="34" charset="-120"/>
               </a:rPr>
-              <a:t>A studio charges a $25 setup fee plus $8 per recording hour. With h hours, what expression models the cost, and what does each part represent?</a:t>
+              <a:t>Each recording layer doubles the file size, modeled by 4 × 2ⁿ. Why does the file size grow so fast as you add layers?</a:t>
             </a:r>
             <a:endParaRPr lang="en-US" sz="1000" dirty="0"/>
           </a:p>
@@ -8989,7 +8918,7 @@
                 <a:ea typeface="Outfit" pitchFamily="34" charset="-122"/>
                 <a:cs typeface="Outfit" pitchFamily="34" charset="-120"/>
               </a:rPr>
-              <a:t>6.AT.6a</a:t>
+              <a:t>6.AT.5</a:t>
             </a:r>
             <a:endParaRPr lang="en-US" sz="900" dirty="0"/>
           </a:p>
@@ -9208,7 +9137,7 @@
                 <a:ea typeface="Hanken Grotesk" pitchFamily="34" charset="-122"/>
                 <a:cs typeface="Hanken Grotesk" pitchFamily="34" charset="-120"/>
               </a:rPr>
-              <a:t>Reveal Math Grade 6  ·  Unit 6  ·  Lesson 6-3</a:t>
+              <a:t>Reveal Math Grade 6  ·  Unit 6  ·  Lesson 6-1</a:t>
             </a:r>
             <a:endParaRPr lang="en-US" sz="750" dirty="0"/>
           </a:p>
@@ -9412,7 +9341,7 @@
                 <a:ea typeface="Hanken Grotesk" pitchFamily="34" charset="-122"/>
                 <a:cs typeface="Hanken Grotesk" pitchFamily="34" charset="-120"/>
               </a:rPr>
-              <a:t>Today's key idea is "Words like "each" or "per" mean multiply, and "plus" or "more than" mean add." — and it works because ___.</a:t>
+              <a:t>Today's key idea is "A power like 2³ is a short way to write repeated multiplication: 2 × 2 × 2." — and it works because ___.</a:t>
             </a:r>
             <a:endParaRPr lang="en-US" sz="1050" dirty="0"/>
           </a:p>
@@ -9561,7 +9490,7 @@
                 <a:ea typeface="Hanken Grotesk" pitchFamily="34" charset="-122"/>
                 <a:cs typeface="Hanken Grotesk" pitchFamily="34" charset="-120"/>
               </a:rPr>
-              <a:t>Because Variable means ___, but a tricky part is ___, so I have to ___.</a:t>
+              <a:t>Because Exponent means ___, but a tricky part is ___, so I have to ___.</a:t>
             </a:r>
             <a:endParaRPr lang="en-US" sz="1050" dirty="0"/>
           </a:p>
@@ -9710,7 +9639,7 @@
                 <a:ea typeface="Hanken Grotesk" pitchFamily="34" charset="-122"/>
                 <a:cs typeface="Hanken Grotesk" pitchFamily="34" charset="-120"/>
               </a:rPr>
-              <a:t>A common mistake with Variable is ___. It happens because ___, and the fix is ___.</a:t>
+              <a:t>A common mistake with Exponent is ___. It happens because ___, and the fix is ___.</a:t>
             </a:r>
             <a:endParaRPr lang="en-US" sz="1050" dirty="0"/>
           </a:p>
@@ -9906,7 +9835,7 @@
                 <a:ea typeface="Outfit" pitchFamily="34" charset="-122"/>
                 <a:cs typeface="Outfit" pitchFamily="34" charset="-120"/>
               </a:rPr>
-              <a:t>6.AT.6a</a:t>
+              <a:t>6.AT.5</a:t>
             </a:r>
             <a:endParaRPr lang="en-US" sz="900" dirty="0"/>
           </a:p>
@@ -10125,7 +10054,7 @@
                 <a:ea typeface="Hanken Grotesk" pitchFamily="34" charset="-122"/>
                 <a:cs typeface="Hanken Grotesk" pitchFamily="34" charset="-120"/>
               </a:rPr>
-              <a:t>Reveal Math Grade 6  ·  Unit 6  ·  Lesson 6-3</a:t>
+              <a:t>Reveal Math Grade 6  ·  Unit 6  ·  Lesson 6-1</a:t>
             </a:r>
             <a:endParaRPr lang="en-US" sz="750" dirty="0"/>
           </a:p>
@@ -10583,7 +10512,7 @@
                 <a:ea typeface="Hanken Grotesk" pitchFamily="34" charset="-122"/>
                 <a:cs typeface="Hanken Grotesk" pitchFamily="34" charset="-120"/>
               </a:rPr>
-              <a:t>Which expression represents '3 more than twice a number n'?</a:t>
+              <a:t>What is the value of 3⁴?</a:t>
             </a:r>
             <a:endParaRPr lang="en-US" sz="1050" dirty="0"/>
           </a:p>
@@ -10622,7 +10551,7 @@
                 <a:ea typeface="Hanken Grotesk" pitchFamily="34" charset="-122"/>
                 <a:cs typeface="Hanken Grotesk" pitchFamily="34" charset="-120"/>
               </a:rPr>
-              <a:t>A.  2n + 3</a:t>
+              <a:t>A.  81</a:t>
             </a:r>
             <a:endParaRPr lang="en-US" sz="1000" dirty="0"/>
           </a:p>
@@ -10661,7 +10590,7 @@
                 <a:ea typeface="Hanken Grotesk" pitchFamily="34" charset="-122"/>
                 <a:cs typeface="Hanken Grotesk" pitchFamily="34" charset="-120"/>
               </a:rPr>
-              <a:t>B.  3n + 2</a:t>
+              <a:t>B.  12</a:t>
             </a:r>
             <a:endParaRPr lang="en-US" sz="1000" dirty="0"/>
           </a:p>
@@ -10700,7 +10629,7 @@
                 <a:ea typeface="Hanken Grotesk" pitchFamily="34" charset="-122"/>
                 <a:cs typeface="Hanken Grotesk" pitchFamily="34" charset="-120"/>
               </a:rPr>
-              <a:t>C.  2(n + 3)</a:t>
+              <a:t>C.  34</a:t>
             </a:r>
             <a:endParaRPr lang="en-US" sz="1000" dirty="0"/>
           </a:p>
@@ -10739,7 +10668,7 @@
                 <a:ea typeface="Hanken Grotesk" pitchFamily="34" charset="-122"/>
                 <a:cs typeface="Hanken Grotesk" pitchFamily="34" charset="-120"/>
               </a:rPr>
-              <a:t>D.  2 + 3n</a:t>
+              <a:t>D.  64</a:t>
             </a:r>
             <a:endParaRPr lang="en-US" sz="1000" dirty="0"/>
           </a:p>
@@ -11034,7 +10963,7 @@
                 <a:ea typeface="Outfit" pitchFamily="34" charset="-122"/>
                 <a:cs typeface="Outfit" pitchFamily="34" charset="-120"/>
               </a:rPr>
-              <a:t>6.AT.6a</a:t>
+              <a:t>6.AT.5</a:t>
             </a:r>
             <a:endParaRPr lang="en-US" sz="900" dirty="0"/>
           </a:p>
@@ -11253,7 +11182,7 @@
                 <a:ea typeface="Hanken Grotesk" pitchFamily="34" charset="-122"/>
                 <a:cs typeface="Hanken Grotesk" pitchFamily="34" charset="-120"/>
               </a:rPr>
-              <a:t>Reveal Math Grade 6  ·  Unit 6  ·  Lesson 6-3</a:t>
+              <a:t>Reveal Math Grade 6  ·  Unit 6  ·  Lesson 6-1</a:t>
             </a:r>
             <a:endParaRPr lang="en-US" sz="750" dirty="0"/>
           </a:p>
@@ -11367,7 +11296,7 @@
                 <a:ea typeface="Hanken Grotesk" pitchFamily="34" charset="-122"/>
                 <a:cs typeface="Hanken Grotesk" pitchFamily="34" charset="-120"/>
               </a:rPr>
-              <a:t>I can write algebraic expressions from words and real-world situations.</a:t>
+              <a:t>I can write and evaluate numbers in exponent form using a base and a power.</a:t>
             </a:r>
             <a:endParaRPr lang="en-US" sz="1100" dirty="0"/>
           </a:p>
@@ -12467,7 +12396,7 @@
                 <a:ea typeface="Outfit" pitchFamily="34" charset="-122"/>
                 <a:cs typeface="Outfit" pitchFamily="34" charset="-120"/>
               </a:rPr>
-              <a:t>6.AT.6a</a:t>
+              <a:t>6.AT.5</a:t>
             </a:r>
             <a:endParaRPr lang="en-US" sz="900" dirty="0"/>
           </a:p>
@@ -12686,7 +12615,7 @@
                 <a:ea typeface="Hanken Grotesk" pitchFamily="34" charset="-122"/>
                 <a:cs typeface="Hanken Grotesk" pitchFamily="34" charset="-120"/>
               </a:rPr>
-              <a:t>Reveal Math Grade 6  ·  Unit 6  ·  Lesson 6-3</a:t>
+              <a:t>Reveal Math Grade 6  ·  Unit 6  ·  Lesson 6-1</a:t>
             </a:r>
             <a:endParaRPr lang="en-US" sz="750" dirty="0"/>
           </a:p>
@@ -12936,7 +12865,7 @@
                 <a:ea typeface="Hanken Grotesk" pitchFamily="34" charset="-122"/>
                 <a:cs typeface="Hanken Grotesk" pitchFamily="34" charset="-120"/>
               </a:rPr>
-              <a:t>I can write algebraic expressions from words and real-world situations.</a:t>
+              <a:t>I can write and evaluate numbers in exponent form using a base and a power.</a:t>
             </a:r>
             <a:endParaRPr lang="en-US" sz="1800" dirty="0"/>
           </a:p>
@@ -13108,7 +13037,7 @@
                 <a:ea typeface="Hanken Grotesk" pitchFamily="34" charset="-122"/>
                 <a:cs typeface="Hanken Grotesk" pitchFamily="34" charset="-120"/>
               </a:rPr>
-              <a:t>I can explain my expression using the words variable, coefficient, constant, and algebraic expression.</a:t>
+              <a:t>I can explain my work using the words exponent, base, power, and evaluate.</a:t>
             </a:r>
             <a:endParaRPr lang="en-US" sz="1700" dirty="0"/>
           </a:p>
@@ -13281,7 +13210,7 @@
                 <a:ea typeface="Outfit" pitchFamily="34" charset="-122"/>
                 <a:cs typeface="Outfit" pitchFamily="34" charset="-120"/>
               </a:rPr>
-              <a:t>6.AT.6a</a:t>
+              <a:t>6.AT.5</a:t>
             </a:r>
             <a:endParaRPr lang="en-US" sz="900" dirty="0"/>
           </a:p>
@@ -13500,7 +13429,7 @@
                 <a:ea typeface="Hanken Grotesk" pitchFamily="34" charset="-122"/>
                 <a:cs typeface="Hanken Grotesk" pitchFamily="34" charset="-120"/>
               </a:rPr>
-              <a:t>Reveal Math Grade 6  ·  Unit 6  ·  Lesson 6-3</a:t>
+              <a:t>Reveal Math Grade 6  ·  Unit 6  ·  Lesson 6-1</a:t>
             </a:r>
             <a:endParaRPr lang="en-US" sz="750" dirty="0"/>
           </a:p>
@@ -13697,7 +13626,7 @@
                 <a:ea typeface="Hanken Grotesk" pitchFamily="34" charset="-122"/>
                 <a:cs typeface="Hanken Grotesk" pitchFamily="34" charset="-120"/>
               </a:rPr>
-              <a:t>Tickets cost $12 each with a flat $50 venue fee. If t is the number of tickets, how would you write an expression for total revenue, and which part changes with the crowd?</a:t>
+              <a:t>In the sound studio, the volume doubles each time you flip the switch. Why is the volume after 3 flips 2³ = 8 and not 2 × 3 = 6?</a:t>
             </a:r>
             <a:endParaRPr lang="en-US" sz="1400" dirty="0"/>
           </a:p>
@@ -14027,7 +13956,7 @@
                 <a:ea typeface="Hanken Grotesk" pitchFamily="34" charset="-122"/>
                 <a:cs typeface="Hanken Grotesk" pitchFamily="34" charset="-120"/>
               </a:rPr>
-              <a:t>Variable</a:t>
+              <a:t>Exponent</a:t>
             </a:r>
             <a:endParaRPr lang="en-US" sz="900" dirty="0"/>
           </a:p>
@@ -14074,7 +14003,7 @@
                 <a:ea typeface="Hanken Grotesk" pitchFamily="34" charset="-122"/>
                 <a:cs typeface="Hanken Grotesk" pitchFamily="34" charset="-120"/>
               </a:rPr>
-              <a:t>Coefficient</a:t>
+              <a:t>Base</a:t>
             </a:r>
             <a:endParaRPr lang="en-US" sz="900" dirty="0"/>
           </a:p>
@@ -14121,7 +14050,7 @@
                 <a:ea typeface="Hanken Grotesk" pitchFamily="34" charset="-122"/>
                 <a:cs typeface="Hanken Grotesk" pitchFamily="34" charset="-120"/>
               </a:rPr>
-              <a:t>Constant</a:t>
+              <a:t>Power</a:t>
             </a:r>
             <a:endParaRPr lang="en-US" sz="900" dirty="0"/>
           </a:p>
@@ -14168,7 +14097,7 @@
                 <a:ea typeface="Hanken Grotesk" pitchFamily="34" charset="-122"/>
                 <a:cs typeface="Hanken Grotesk" pitchFamily="34" charset="-120"/>
               </a:rPr>
-              <a:t>Algebraic Expression</a:t>
+              <a:t>Evaluate</a:t>
             </a:r>
             <a:endParaRPr lang="en-US" sz="900" dirty="0"/>
           </a:p>
@@ -14341,7 +14270,7 @@
                 <a:ea typeface="Outfit" pitchFamily="34" charset="-122"/>
                 <a:cs typeface="Outfit" pitchFamily="34" charset="-120"/>
               </a:rPr>
-              <a:t>6.AT.6a</a:t>
+              <a:t>6.AT.5</a:t>
             </a:r>
             <a:endParaRPr lang="en-US" sz="900" dirty="0"/>
           </a:p>
@@ -14560,7 +14489,7 @@
                 <a:ea typeface="Hanken Grotesk" pitchFamily="34" charset="-122"/>
                 <a:cs typeface="Hanken Grotesk" pitchFamily="34" charset="-120"/>
               </a:rPr>
-              <a:t>Reveal Math Grade 6  ·  Unit 6  ·  Lesson 6-3</a:t>
+              <a:t>Reveal Math Grade 6  ·  Unit 6  ·  Lesson 6-1</a:t>
             </a:r>
             <a:endParaRPr lang="en-US" sz="750" dirty="0"/>
           </a:p>
@@ -14757,7 +14686,7 @@
                 <a:ea typeface="Hanken Grotesk" pitchFamily="34" charset="-122"/>
                 <a:cs typeface="Hanken Grotesk" pitchFamily="34" charset="-120"/>
               </a:rPr>
-              <a:t>How do you turn words into an expression? Why does '12 less than a number g' become g − 12 and not 12 − g?</a:t>
+              <a:t>Look at the table: when the exponent goes up by 1 (like from 2³ to 2⁴), what happens to the value, and why?</a:t>
             </a:r>
             <a:endParaRPr lang="en-US" sz="1400" dirty="0"/>
           </a:p>
@@ -15087,7 +15016,7 @@
                 <a:ea typeface="Hanken Grotesk" pitchFamily="34" charset="-122"/>
                 <a:cs typeface="Hanken Grotesk" pitchFamily="34" charset="-120"/>
               </a:rPr>
-              <a:t>Algebraic Expression</a:t>
+              <a:t>Exponent</a:t>
             </a:r>
             <a:endParaRPr lang="en-US" sz="900" dirty="0"/>
           </a:p>
@@ -15134,7 +15063,7 @@
                 <a:ea typeface="Hanken Grotesk" pitchFamily="34" charset="-122"/>
                 <a:cs typeface="Hanken Grotesk" pitchFamily="34" charset="-120"/>
               </a:rPr>
-              <a:t>Variable</a:t>
+              <a:t>Base</a:t>
             </a:r>
             <a:endParaRPr lang="en-US" sz="900" dirty="0"/>
           </a:p>
@@ -15181,7 +15110,7 @@
                 <a:ea typeface="Hanken Grotesk" pitchFamily="34" charset="-122"/>
                 <a:cs typeface="Hanken Grotesk" pitchFamily="34" charset="-120"/>
               </a:rPr>
-              <a:t>Coefficient</a:t>
+              <a:t>Power</a:t>
             </a:r>
             <a:endParaRPr lang="en-US" sz="900" dirty="0"/>
           </a:p>
@@ -15228,7 +15157,7 @@
                 <a:ea typeface="Hanken Grotesk" pitchFamily="34" charset="-122"/>
                 <a:cs typeface="Hanken Grotesk" pitchFamily="34" charset="-120"/>
               </a:rPr>
-              <a:t>Constant</a:t>
+              <a:t>Evaluate</a:t>
             </a:r>
             <a:endParaRPr lang="en-US" sz="900" dirty="0"/>
           </a:p>
@@ -15401,7 +15330,7 @@
                 <a:ea typeface="Outfit" pitchFamily="34" charset="-122"/>
                 <a:cs typeface="Outfit" pitchFamily="34" charset="-120"/>
               </a:rPr>
-              <a:t>6.AT.6a</a:t>
+              <a:t>6.AT.5</a:t>
             </a:r>
             <a:endParaRPr lang="en-US" sz="900" dirty="0"/>
           </a:p>
@@ -15620,7 +15549,7 @@
                 <a:ea typeface="Hanken Grotesk" pitchFamily="34" charset="-122"/>
                 <a:cs typeface="Hanken Grotesk" pitchFamily="34" charset="-120"/>
               </a:rPr>
-              <a:t>Reveal Math Grade 6  ·  Unit 6  ·  Lesson 6-3</a:t>
+              <a:t>Reveal Math Grade 6  ·  Unit 6  ·  Lesson 6-1</a:t>
             </a:r>
             <a:endParaRPr lang="en-US" sz="750" dirty="0"/>
           </a:p>
@@ -15817,7 +15746,7 @@
                 <a:ea typeface="Hanken Grotesk" pitchFamily="34" charset="-122"/>
                 <a:cs typeface="Hanken Grotesk" pitchFamily="34" charset="-120"/>
               </a:rPr>
-              <a:t>A studio charges a $25 setup fee plus $8 per recording hour. With h hours, what expression models the cost, and what does each part represent?</a:t>
+              <a:t>Each recording layer doubles the file size, modeled by 4 × 2ⁿ. Why does the file size grow so fast as you add layers?</a:t>
             </a:r>
             <a:endParaRPr lang="en-US" sz="1400" dirty="0"/>
           </a:p>
@@ -16147,7 +16076,7 @@
                 <a:ea typeface="Hanken Grotesk" pitchFamily="34" charset="-122"/>
                 <a:cs typeface="Hanken Grotesk" pitchFamily="34" charset="-120"/>
               </a:rPr>
-              <a:t>Constant</a:t>
+              <a:t>Power</a:t>
             </a:r>
             <a:endParaRPr lang="en-US" sz="900" dirty="0"/>
           </a:p>
@@ -16194,7 +16123,7 @@
                 <a:ea typeface="Hanken Grotesk" pitchFamily="34" charset="-122"/>
                 <a:cs typeface="Hanken Grotesk" pitchFamily="34" charset="-120"/>
               </a:rPr>
-              <a:t>Variable</a:t>
+              <a:t>Base</a:t>
             </a:r>
             <a:endParaRPr lang="en-US" sz="900" dirty="0"/>
           </a:p>
@@ -16241,7 +16170,7 @@
                 <a:ea typeface="Hanken Grotesk" pitchFamily="34" charset="-122"/>
                 <a:cs typeface="Hanken Grotesk" pitchFamily="34" charset="-120"/>
               </a:rPr>
-              <a:t>Coefficient</a:t>
+              <a:t>Exponent</a:t>
             </a:r>
             <a:endParaRPr lang="en-US" sz="900" dirty="0"/>
           </a:p>
@@ -16288,7 +16217,7 @@
                 <a:ea typeface="Hanken Grotesk" pitchFamily="34" charset="-122"/>
                 <a:cs typeface="Hanken Grotesk" pitchFamily="34" charset="-120"/>
               </a:rPr>
-              <a:t>Algebraic Expression</a:t>
+              <a:t>Evaluate</a:t>
             </a:r>
             <a:endParaRPr lang="en-US" sz="900" dirty="0"/>
           </a:p>
@@ -16461,7 +16390,7 @@
                 <a:ea typeface="Outfit" pitchFamily="34" charset="-122"/>
                 <a:cs typeface="Outfit" pitchFamily="34" charset="-120"/>
               </a:rPr>
-              <a:t>6.AT.6a</a:t>
+              <a:t>6.AT.5</a:t>
             </a:r>
             <a:endParaRPr lang="en-US" sz="900" dirty="0"/>
           </a:p>
@@ -16680,7 +16609,7 @@
                 <a:ea typeface="Hanken Grotesk" pitchFamily="34" charset="-122"/>
                 <a:cs typeface="Hanken Grotesk" pitchFamily="34" charset="-120"/>
               </a:rPr>
-              <a:t>Reveal Math Grade 6  ·  Unit 6  ·  Lesson 6-3</a:t>
+              <a:t>Reveal Math Grade 6  ·  Unit 6  ·  Lesson 6-1</a:t>
             </a:r>
             <a:endParaRPr lang="en-US" sz="750" dirty="0"/>
           </a:p>
@@ -16877,7 +16806,7 @@
                 <a:ea typeface="Hanken Grotesk" pitchFamily="34" charset="-122"/>
                 <a:cs typeface="Hanken Grotesk" pitchFamily="34" charset="-120"/>
               </a:rPr>
-              <a:t>During practice on Write Algebraic Expressions, what strategy did you use when a problem felt tricky?</a:t>
+              <a:t>During practice on Powers and Exponents, what strategy did you use when a problem felt tricky?</a:t>
             </a:r>
             <a:endParaRPr lang="en-US" sz="1400" dirty="0"/>
           </a:p>
@@ -17207,7 +17136,7 @@
                 <a:ea typeface="Hanken Grotesk" pitchFamily="34" charset="-122"/>
                 <a:cs typeface="Hanken Grotesk" pitchFamily="34" charset="-120"/>
               </a:rPr>
-              <a:t>Variable</a:t>
+              <a:t>Exponent</a:t>
             </a:r>
             <a:endParaRPr lang="en-US" sz="900" dirty="0"/>
           </a:p>
@@ -17254,7 +17183,7 @@
                 <a:ea typeface="Hanken Grotesk" pitchFamily="34" charset="-122"/>
                 <a:cs typeface="Hanken Grotesk" pitchFamily="34" charset="-120"/>
               </a:rPr>
-              <a:t>Algebraic Expression</a:t>
+              <a:t>Base</a:t>
             </a:r>
             <a:endParaRPr lang="en-US" sz="900" dirty="0"/>
           </a:p>
@@ -17301,7 +17230,7 @@
                 <a:ea typeface="Hanken Grotesk" pitchFamily="34" charset="-122"/>
                 <a:cs typeface="Hanken Grotesk" pitchFamily="34" charset="-120"/>
               </a:rPr>
-              <a:t>Coefficient</a:t>
+              <a:t>Power</a:t>
             </a:r>
             <a:endParaRPr lang="en-US" sz="900" dirty="0"/>
           </a:p>
@@ -17348,7 +17277,7 @@
                 <a:ea typeface="Hanken Grotesk" pitchFamily="34" charset="-122"/>
                 <a:cs typeface="Hanken Grotesk" pitchFamily="34" charset="-120"/>
               </a:rPr>
-              <a:t>Constant</a:t>
+              <a:t>Evaluate</a:t>
             </a:r>
             <a:endParaRPr lang="en-US" sz="900" dirty="0"/>
           </a:p>
@@ -17521,7 +17450,7 @@
                 <a:ea typeface="Outfit" pitchFamily="34" charset="-122"/>
                 <a:cs typeface="Outfit" pitchFamily="34" charset="-120"/>
               </a:rPr>
-              <a:t>6.AT.6a</a:t>
+              <a:t>6.AT.5</a:t>
             </a:r>
             <a:endParaRPr lang="en-US" sz="900" dirty="0"/>
           </a:p>
@@ -17740,7 +17669,7 @@
                 <a:ea typeface="Hanken Grotesk" pitchFamily="34" charset="-122"/>
                 <a:cs typeface="Hanken Grotesk" pitchFamily="34" charset="-120"/>
               </a:rPr>
-              <a:t>Reveal Math Grade 6  ·  Unit 6  ·  Lesson 6-3</a:t>
+              <a:t>Reveal Math Grade 6  ·  Unit 6  ·  Lesson 6-1</a:t>
             </a:r>
             <a:endParaRPr lang="en-US" sz="750" dirty="0"/>
           </a:p>
@@ -17895,7 +17824,7 @@
                 <a:ea typeface="Outfit" pitchFamily="34" charset="-122"/>
                 <a:cs typeface="Outfit" pitchFamily="34" charset="-120"/>
               </a:rPr>
-              <a:t>Concert Planner</a:t>
+              <a:t>Sound Check</a:t>
             </a:r>
             <a:endParaRPr lang="en-US" sz="1100" dirty="0"/>
           </a:p>
@@ -17934,7 +17863,7 @@
                 <a:ea typeface="Hanken Grotesk" pitchFamily="34" charset="-122"/>
                 <a:cs typeface="Hanken Grotesk" pitchFamily="34" charset="-120"/>
               </a:rPr>
-              <a:t>You're planning a concert at the music studio. Tickets cost $12 each, and there's a flat $50 venue fee no matter how many people attend. If t represents the number of tickets sold, how would you write an expression for the total revenue?</a:t>
+              <a:t>You're a sound engineer at a music studio. Each time you flip a switch, the volume doubles. The starting volume is 1 unit. After flipping the switch 3 times, the volume is 2³ = 2 × 2 × 2 = 8 units — that's 8 times louder! How loud does it get after more flips?</a:t>
             </a:r>
             <a:endParaRPr lang="en-US" sz="1150" dirty="0"/>
           </a:p>
@@ -18159,7 +18088,7 @@
                 <a:ea typeface="Hanken Grotesk" pitchFamily="34" charset="-122"/>
                 <a:cs typeface="Hanken Grotesk" pitchFamily="34" charset="-120"/>
               </a:rPr>
-              <a:t>•  What value changes depending on how many people come?</a:t>
+              <a:t>•  What happens to the volume each time you flip a switch?</a:t>
             </a:r>
             <a:endParaRPr lang="en-US" sz="1000" dirty="0"/>
           </a:p>
@@ -18179,7 +18108,7 @@
                 <a:ea typeface="Hanken Grotesk" pitchFamily="34" charset="-122"/>
                 <a:cs typeface="Hanken Grotesk" pitchFamily="34" charset="-120"/>
               </a:rPr>
-              <a:t>•  What stays the same no matter the number of tickets?</a:t>
+              <a:t>•  Why is 2³ equal to 8, not 6?</a:t>
             </a:r>
             <a:endParaRPr lang="en-US" sz="1000" dirty="0"/>
           </a:p>
@@ -18199,7 +18128,7 @@
                 <a:ea typeface="Hanken Grotesk" pitchFamily="34" charset="-122"/>
                 <a:cs typeface="Hanken Grotesk" pitchFamily="34" charset="-120"/>
               </a:rPr>
-              <a:t>•  How would you calculate the total if 10 tickets are sold?</a:t>
+              <a:t>•  How is repeated multiplication different from repeated addition?</a:t>
             </a:r>
             <a:endParaRPr lang="en-US" sz="1000" dirty="0"/>
           </a:p>
@@ -18316,7 +18245,7 @@
                 <a:ea typeface="Hanken Grotesk" pitchFamily="34" charset="-122"/>
                 <a:cs typeface="Hanken Grotesk" pitchFamily="34" charset="-120"/>
               </a:rPr>
-              <a:t>•  What if there were two different ticket prices — regular and VIP?</a:t>
+              <a:t>•  What if the volume tripled each time instead of doubled?</a:t>
             </a:r>
             <a:endParaRPr lang="en-US" sz="1000" dirty="0"/>
           </a:p>
@@ -18336,7 +18265,7 @@
                 <a:ea typeface="Hanken Grotesk" pitchFamily="34" charset="-122"/>
                 <a:cs typeface="Hanken Grotesk" pitchFamily="34" charset="-120"/>
               </a:rPr>
-              <a:t>•  How many tickets would need to be sold to earn $200?</a:t>
+              <a:t>•  How many flips would it take to reach over 1,000 volume units?</a:t>
             </a:r>
             <a:endParaRPr lang="en-US" sz="1000" dirty="0"/>
           </a:p>
@@ -18509,7 +18438,7 @@
                 <a:ea typeface="Outfit" pitchFamily="34" charset="-122"/>
                 <a:cs typeface="Outfit" pitchFamily="34" charset="-120"/>
               </a:rPr>
-              <a:t>6.AT.6a</a:t>
+              <a:t>6.AT.5</a:t>
             </a:r>
             <a:endParaRPr lang="en-US" sz="900" dirty="0"/>
           </a:p>
@@ -18728,7 +18657,7 @@
                 <a:ea typeface="Hanken Grotesk" pitchFamily="34" charset="-122"/>
                 <a:cs typeface="Hanken Grotesk" pitchFamily="34" charset="-120"/>
               </a:rPr>
-              <a:t>Reveal Math Grade 6  ·  Unit 6  ·  Lesson 6-3</a:t>
+              <a:t>Reveal Math Grade 6  ·  Unit 6  ·  Lesson 6-1</a:t>
             </a:r>
             <a:endParaRPr lang="en-US" sz="750" dirty="0"/>
           </a:p>
@@ -19024,7 +18953,7 @@
                           <a:ea typeface="Hanken Grotesk" pitchFamily="34" charset="-122"/>
                           <a:cs typeface="Hanken Grotesk" pitchFamily="34" charset="-120"/>
                         </a:rPr>
-                        <a:t>Variable</a:t>
+                        <a:t>Exponent</a:t>
                       </a:r>
                       <a:pPr indent="0" marL="0">
                         <a:buNone/>
@@ -19048,7 +18977,7 @@
                           <a:ea typeface="Hanken Grotesk" pitchFamily="34" charset="-122"/>
                           <a:cs typeface="Hanken Grotesk" pitchFamily="34" charset="-120"/>
                         </a:rPr>
-                        <a:t>Variable</a:t>
+                        <a:t>Exponente</a:t>
                       </a:r>
                       <a:endParaRPr lang="en-US" sz="950" dirty="0">
                         <a:latin typeface="Hanken Grotesk" charset="0"/>
@@ -19116,7 +19045,7 @@
                           <a:ea typeface="Hanken Grotesk" pitchFamily="34" charset="-122"/>
                           <a:cs typeface="Hanken Grotesk" pitchFamily="34" charset="-120"/>
                         </a:rPr>
-                        <a:t>A letter that stands for a number that is unknown or can change.</a:t>
+                        <a:t>A small number that tells how many times to multiply the number by itself.</a:t>
                       </a:r>
                       <a:pPr indent="0" marL="0">
                         <a:buNone/>
@@ -19140,7 +19069,7 @@
                           <a:ea typeface="Hanken Grotesk" pitchFamily="34" charset="-122"/>
                           <a:cs typeface="Hanken Grotesk" pitchFamily="34" charset="-120"/>
                         </a:rPr>
-                        <a:t>Una letra que representa un número desconocido o que puede cambiar.</a:t>
+                        <a:t>Un número pequeño que dice cuántas veces multiplicar el número por sí mismo.</a:t>
                       </a:r>
                       <a:endParaRPr lang="en-US" sz="900" dirty="0">
                         <a:latin typeface="Hanken Grotesk" charset="0"/>
@@ -19208,7 +19137,7 @@
                           <a:ea typeface="Hanken Grotesk" pitchFamily="34" charset="-122"/>
                           <a:cs typeface="Hanken Grotesk" pitchFamily="34" charset="-120"/>
                         </a:rPr>
-                        <a:t>In 5t + 20, t could be hours worked — if t = 3, the expression equals 35; if t = 8, it equals 60</a:t>
+                        <a:t>In 2³, the small 3 means multiply 2 by itself 3 times: 2 × 2 × 2 = 8</a:t>
                       </a:r>
                       <a:endParaRPr lang="en-US" sz="900" dirty="0">
                         <a:latin typeface="Hanken Grotesk" charset="0"/>
@@ -19278,7 +19207,7 @@
                           <a:ea typeface="Hanken Grotesk" pitchFamily="34" charset="-122"/>
                           <a:cs typeface="Hanken Grotesk" pitchFamily="34" charset="-120"/>
                         </a:rPr>
-                        <a:t>Algebraic Expression</a:t>
+                        <a:t>Base</a:t>
                       </a:r>
                       <a:pPr indent="0" marL="0">
                         <a:buNone/>
@@ -19302,7 +19231,7 @@
                           <a:ea typeface="Hanken Grotesk" pitchFamily="34" charset="-122"/>
                           <a:cs typeface="Hanken Grotesk" pitchFamily="34" charset="-120"/>
                         </a:rPr>
-                        <a:t>Expresión algebraica</a:t>
+                        <a:t>Base</a:t>
                       </a:r>
                       <a:endParaRPr lang="en-US" sz="950" dirty="0">
                         <a:latin typeface="Hanken Grotesk" charset="0"/>
@@ -19370,7 +19299,7 @@
                           <a:ea typeface="Hanken Grotesk" pitchFamily="34" charset="-122"/>
                           <a:cs typeface="Hanken Grotesk" pitchFamily="34" charset="-120"/>
                         </a:rPr>
-                        <a:t>A math phrase that has at least one letter.</a:t>
+                        <a:t>The number that gets multiplied by itself.</a:t>
                       </a:r>
                       <a:pPr indent="0" marL="0">
                         <a:buNone/>
@@ -19394,7 +19323,7 @@
                           <a:ea typeface="Hanken Grotesk" pitchFamily="34" charset="-122"/>
                           <a:cs typeface="Hanken Grotesk" pitchFamily="34" charset="-120"/>
                         </a:rPr>
-                        <a:t>Una frase matemática que tiene al menos una letra.</a:t>
+                        <a:t>El número que se multiplica por sí mismo.</a:t>
                       </a:r>
                       <a:endParaRPr lang="en-US" sz="900" dirty="0">
                         <a:latin typeface="Hanken Grotesk" charset="0"/>
@@ -19462,7 +19391,7 @@
                           <a:ea typeface="Hanken Grotesk" pitchFamily="34" charset="-122"/>
                           <a:cs typeface="Hanken Grotesk" pitchFamily="34" charset="-120"/>
                         </a:rPr>
-                        <a:t>3n + 7 means 'triple a number, then add 7' — it has a variable (n), a coefficient (3), and a constant (7)</a:t>
+                        <a:t>In 5², the base is 5 — it is the number being multiplied: 5 × 5 = 25</a:t>
                       </a:r>
                       <a:endParaRPr lang="en-US" sz="900" dirty="0">
                         <a:latin typeface="Hanken Grotesk" charset="0"/>
@@ -19532,7 +19461,7 @@
                           <a:ea typeface="Hanken Grotesk" pitchFamily="34" charset="-122"/>
                           <a:cs typeface="Hanken Grotesk" pitchFamily="34" charset="-120"/>
                         </a:rPr>
-                        <a:t>Coefficient</a:t>
+                        <a:t>Power</a:t>
                       </a:r>
                       <a:pPr indent="0" marL="0">
                         <a:buNone/>
@@ -19556,7 +19485,7 @@
                           <a:ea typeface="Hanken Grotesk" pitchFamily="34" charset="-122"/>
                           <a:cs typeface="Hanken Grotesk" pitchFamily="34" charset="-120"/>
                         </a:rPr>
-                        <a:t>Coeficiente</a:t>
+                        <a:t>Potencia</a:t>
                       </a:r>
                       <a:endParaRPr lang="en-US" sz="950" dirty="0">
                         <a:latin typeface="Hanken Grotesk" charset="0"/>
@@ -19624,7 +19553,7 @@
                           <a:ea typeface="Hanken Grotesk" pitchFamily="34" charset="-122"/>
                           <a:cs typeface="Hanken Grotesk" pitchFamily="34" charset="-120"/>
                         </a:rPr>
-                        <a:t>The number in front of a letter, like the 3 in 3x.</a:t>
+                        <a:t>A number written with a base and an exponent, like 2³.</a:t>
                       </a:r>
                       <a:pPr indent="0" marL="0">
                         <a:buNone/>
@@ -19648,7 +19577,7 @@
                           <a:ea typeface="Hanken Grotesk" pitchFamily="34" charset="-122"/>
                           <a:cs typeface="Hanken Grotesk" pitchFamily="34" charset="-120"/>
                         </a:rPr>
-                        <a:t>El número frente a una letra, como el 3 en 3x.</a:t>
+                        <a:t>Un número escrito con una base y un exponente, como 2³.</a:t>
                       </a:r>
                       <a:endParaRPr lang="en-US" sz="900" dirty="0">
                         <a:latin typeface="Hanken Grotesk" charset="0"/>
@@ -19716,7 +19645,7 @@
                           <a:ea typeface="Hanken Grotesk" pitchFamily="34" charset="-122"/>
                           <a:cs typeface="Hanken Grotesk" pitchFamily="34" charset="-120"/>
                         </a:rPr>
-                        <a:t>In 8x, the coefficient 8 means '8 groups of x' — if x = 3, then 8x = 8 × 3 = 24</a:t>
+                        <a:t>10³ = 10 × 10 × 10 = 1,000 — read as '10 to the third power' or '10 cubed'</a:t>
                       </a:r>
                       <a:endParaRPr lang="en-US" sz="900" dirty="0">
                         <a:latin typeface="Hanken Grotesk" charset="0"/>
@@ -19786,7 +19715,7 @@
                           <a:ea typeface="Hanken Grotesk" pitchFamily="34" charset="-122"/>
                           <a:cs typeface="Hanken Grotesk" pitchFamily="34" charset="-120"/>
                         </a:rPr>
-                        <a:t>Constant</a:t>
+                        <a:t>Evaluate</a:t>
                       </a:r>
                       <a:pPr indent="0" marL="0">
                         <a:buNone/>
@@ -19810,7 +19739,7 @@
                           <a:ea typeface="Hanken Grotesk" pitchFamily="34" charset="-122"/>
                           <a:cs typeface="Hanken Grotesk" pitchFamily="34" charset="-120"/>
                         </a:rPr>
-                        <a:t>Constante</a:t>
+                        <a:t>Evaluar</a:t>
                       </a:r>
                       <a:endParaRPr lang="en-US" sz="950" dirty="0">
                         <a:latin typeface="Hanken Grotesk" charset="0"/>
@@ -19878,7 +19807,7 @@
                           <a:ea typeface="Hanken Grotesk" pitchFamily="34" charset="-122"/>
                           <a:cs typeface="Hanken Grotesk" pitchFamily="34" charset="-120"/>
                         </a:rPr>
-                        <a:t>A number on its own that does not change.</a:t>
+                        <a:t>To find the value of an expression.</a:t>
                       </a:r>
                       <a:pPr indent="0" marL="0">
                         <a:buNone/>
@@ -19902,7 +19831,7 @@
                           <a:ea typeface="Hanken Grotesk" pitchFamily="34" charset="-122"/>
                           <a:cs typeface="Hanken Grotesk" pitchFamily="34" charset="-120"/>
                         </a:rPr>
-                        <a:t>Un número solo que no cambia.</a:t>
+                        <a:t>Encontrar el valor de una expresión.</a:t>
                       </a:r>
                       <a:endParaRPr lang="en-US" sz="900" dirty="0">
                         <a:latin typeface="Hanken Grotesk" charset="0"/>
@@ -19970,7 +19899,7 @@
                           <a:ea typeface="Hanken Grotesk" pitchFamily="34" charset="-122"/>
                           <a:cs typeface="Hanken Grotesk" pitchFamily="34" charset="-120"/>
                         </a:rPr>
-                        <a:t>In 3n + 7, the 7 never changes no matter what n is — like a flat fee that stays the same</a:t>
+                        <a:t>Evaluate 3⁴: write 3 × 3 × 3 × 3, then multiply step by step: 9 × 9 = 81</a:t>
                       </a:r>
                       <a:endParaRPr lang="en-US" sz="900" dirty="0">
                         <a:latin typeface="Hanken Grotesk" charset="0"/>
@@ -20022,260 +19951,6 @@
                   </a:tcPr>
                 </a:tc>
               </a:tr>
-              <a:tr h="457200">
-                <a:tc>
-                  <a:txBody>
-                    <a:bodyPr/>
-                    <a:lstStyle/>
-                    <a:p>
-                      <a:pPr indent="0" marL="0">
-                        <a:buNone/>
-                      </a:pPr>
-                      <a:r>
-                        <a:rPr lang="en-US" sz="950" b="1" dirty="0">
-                          <a:solidFill>
-                            <a:srgbClr val="17324D"/>
-                          </a:solidFill>
-                          <a:latin typeface="Hanken Grotesk" pitchFamily="34" charset="0"/>
-                          <a:ea typeface="Hanken Grotesk" pitchFamily="34" charset="-122"/>
-                          <a:cs typeface="Hanken Grotesk" pitchFamily="34" charset="-120"/>
-                        </a:rPr>
-                        <a:t>Like terms</a:t>
-                      </a:r>
-                      <a:pPr indent="0" marL="0">
-                        <a:buNone/>
-                      </a:pPr>
-                      <a:endParaRPr lang="en-US" sz="950" dirty="0">
-                        <a:latin typeface="Hanken Grotesk" charset="0"/>
-                        <a:ea typeface="Hanken Grotesk" charset="0"/>
-                        <a:cs typeface="Hanken Grotesk" charset="0"/>
-                      </a:endParaRPr>
-                    </a:p>
-                    <a:p>
-                      <a:pPr indent="0" marL="0">
-                        <a:buNone/>
-                      </a:pPr>
-                      <a:r>
-                        <a:rPr lang="en-US" sz="850" i="1" dirty="0">
-                          <a:solidFill>
-                            <a:srgbClr val="8A96A3"/>
-                          </a:solidFill>
-                          <a:latin typeface="Hanken Grotesk" pitchFamily="34" charset="0"/>
-                          <a:ea typeface="Hanken Grotesk" pitchFamily="34" charset="-122"/>
-                          <a:cs typeface="Hanken Grotesk" pitchFamily="34" charset="-120"/>
-                        </a:rPr>
-                        <a:t>Términos semejantes</a:t>
-                      </a:r>
-                      <a:endParaRPr lang="en-US" sz="950" dirty="0">
-                        <a:latin typeface="Hanken Grotesk" charset="0"/>
-                        <a:ea typeface="Hanken Grotesk" charset="0"/>
-                        <a:cs typeface="Hanken Grotesk" charset="0"/>
-                      </a:endParaRPr>
-                    </a:p>
-                  </a:txBody>
-                  <a:tcPr marL="91440" marR="91440" marT="45720" marB="45720" anchor="ctr">
-                    <a:lnL w="9525" cap="flat" cmpd="sng" algn="ctr">
-                      <a:solidFill>
-                        <a:srgbClr val="D6DBDF"/>
-                      </a:solidFill>
-                      <a:prstDash val="solid"/>
-                      <a:round/>
-                      <a:headEnd type="none" w="med" len="med"/>
-                      <a:tailEnd type="none" w="med" len="med"/>
-                    </a:lnL>
-                    <a:lnR w="9525" cap="flat" cmpd="sng" algn="ctr">
-                      <a:solidFill>
-                        <a:srgbClr val="D6DBDF"/>
-                      </a:solidFill>
-                      <a:prstDash val="solid"/>
-                      <a:round/>
-                      <a:headEnd type="none" w="med" len="med"/>
-                      <a:tailEnd type="none" w="med" len="med"/>
-                    </a:lnR>
-                    <a:lnT w="9525" cap="flat" cmpd="sng" algn="ctr">
-                      <a:solidFill>
-                        <a:srgbClr val="D6DBDF"/>
-                      </a:solidFill>
-                      <a:prstDash val="solid"/>
-                      <a:round/>
-                      <a:headEnd type="none" w="med" len="med"/>
-                      <a:tailEnd type="none" w="med" len="med"/>
-                    </a:lnT>
-                    <a:lnB w="9525" cap="flat" cmpd="sng" algn="ctr">
-                      <a:solidFill>
-                        <a:srgbClr val="D6DBDF"/>
-                      </a:solidFill>
-                      <a:prstDash val="solid"/>
-                      <a:round/>
-                      <a:headEnd type="none" w="med" len="med"/>
-                      <a:tailEnd type="none" w="med" len="med"/>
-                    </a:lnB>
-                    <a:solidFill>
-                      <a:srgbClr val="FFFFFF"/>
-                    </a:solidFill>
-                  </a:tcPr>
-                </a:tc>
-                <a:tc>
-                  <a:txBody>
-                    <a:bodyPr/>
-                    <a:lstStyle/>
-                    <a:p>
-                      <a:pPr indent="0" marL="0">
-                        <a:buNone/>
-                      </a:pPr>
-                      <a:r>
-                        <a:rPr lang="en-US" sz="900" dirty="0">
-                          <a:solidFill>
-                            <a:srgbClr val="24323F"/>
-                          </a:solidFill>
-                          <a:latin typeface="Hanken Grotesk" pitchFamily="34" charset="0"/>
-                          <a:ea typeface="Hanken Grotesk" pitchFamily="34" charset="-122"/>
-                          <a:cs typeface="Hanken Grotesk" pitchFamily="34" charset="-120"/>
-                        </a:rPr>
-                        <a:t>Terms with the same letter, like 2x and 5x.</a:t>
-                      </a:r>
-                      <a:pPr indent="0" marL="0">
-                        <a:buNone/>
-                      </a:pPr>
-                      <a:endParaRPr lang="en-US" sz="900" dirty="0">
-                        <a:latin typeface="Hanken Grotesk" charset="0"/>
-                        <a:ea typeface="Hanken Grotesk" charset="0"/>
-                        <a:cs typeface="Hanken Grotesk" charset="0"/>
-                      </a:endParaRPr>
-                    </a:p>
-                    <a:p>
-                      <a:pPr indent="0" marL="0">
-                        <a:buNone/>
-                      </a:pPr>
-                      <a:r>
-                        <a:rPr lang="en-US" sz="850" i="1" dirty="0">
-                          <a:solidFill>
-                            <a:srgbClr val="8A96A3"/>
-                          </a:solidFill>
-                          <a:latin typeface="Hanken Grotesk" pitchFamily="34" charset="0"/>
-                          <a:ea typeface="Hanken Grotesk" pitchFamily="34" charset="-122"/>
-                          <a:cs typeface="Hanken Grotesk" pitchFamily="34" charset="-120"/>
-                        </a:rPr>
-                        <a:t>Términos con la misma letra, como 2x y 5x.</a:t>
-                      </a:r>
-                      <a:endParaRPr lang="en-US" sz="900" dirty="0">
-                        <a:latin typeface="Hanken Grotesk" charset="0"/>
-                        <a:ea typeface="Hanken Grotesk" charset="0"/>
-                        <a:cs typeface="Hanken Grotesk" charset="0"/>
-                      </a:endParaRPr>
-                    </a:p>
-                  </a:txBody>
-                  <a:tcPr marL="91440" marR="91440" marT="45720" marB="45720" anchor="ctr">
-                    <a:lnL w="9525" cap="flat" cmpd="sng" algn="ctr">
-                      <a:solidFill>
-                        <a:srgbClr val="D6DBDF"/>
-                      </a:solidFill>
-                      <a:prstDash val="solid"/>
-                      <a:round/>
-                      <a:headEnd type="none" w="med" len="med"/>
-                      <a:tailEnd type="none" w="med" len="med"/>
-                    </a:lnL>
-                    <a:lnR w="9525" cap="flat" cmpd="sng" algn="ctr">
-                      <a:solidFill>
-                        <a:srgbClr val="D6DBDF"/>
-                      </a:solidFill>
-                      <a:prstDash val="solid"/>
-                      <a:round/>
-                      <a:headEnd type="none" w="med" len="med"/>
-                      <a:tailEnd type="none" w="med" len="med"/>
-                    </a:lnR>
-                    <a:lnT w="9525" cap="flat" cmpd="sng" algn="ctr">
-                      <a:solidFill>
-                        <a:srgbClr val="D6DBDF"/>
-                      </a:solidFill>
-                      <a:prstDash val="solid"/>
-                      <a:round/>
-                      <a:headEnd type="none" w="med" len="med"/>
-                      <a:tailEnd type="none" w="med" len="med"/>
-                    </a:lnT>
-                    <a:lnB w="9525" cap="flat" cmpd="sng" algn="ctr">
-                      <a:solidFill>
-                        <a:srgbClr val="D6DBDF"/>
-                      </a:solidFill>
-                      <a:prstDash val="solid"/>
-                      <a:round/>
-                      <a:headEnd type="none" w="med" len="med"/>
-                      <a:tailEnd type="none" w="med" len="med"/>
-                    </a:lnB>
-                    <a:solidFill>
-                      <a:srgbClr val="FFFFFF"/>
-                    </a:solidFill>
-                  </a:tcPr>
-                </a:tc>
-                <a:tc>
-                  <a:txBody>
-                    <a:bodyPr/>
-                    <a:lstStyle/>
-                    <a:p>
-                      <a:pPr indent="0" marL="0">
-                        <a:buNone/>
-                      </a:pPr>
-                      <a:r>
-                        <a:rPr lang="en-US" sz="900" i="1" dirty="0">
-                          <a:solidFill>
-                            <a:srgbClr val="24323F"/>
-                          </a:solidFill>
-                          <a:latin typeface="Hanken Grotesk" pitchFamily="34" charset="0"/>
-                          <a:ea typeface="Hanken Grotesk" pitchFamily="34" charset="-122"/>
-                          <a:cs typeface="Hanken Grotesk" pitchFamily="34" charset="-120"/>
-                        </a:rPr>
-                        <a:t>4x + 2x = 6x (like terms, same variable); but 4x + 2y cannot be combined (different variables)</a:t>
-                      </a:r>
-                      <a:endParaRPr lang="en-US" sz="900" dirty="0">
-                        <a:latin typeface="Hanken Grotesk" charset="0"/>
-                        <a:ea typeface="Hanken Grotesk" charset="0"/>
-                        <a:cs typeface="Hanken Grotesk" charset="0"/>
-                      </a:endParaRPr>
-                    </a:p>
-                  </a:txBody>
-                  <a:tcPr marL="91440" marR="91440" marT="45720" marB="45720" anchor="ctr">
-                    <a:lnL w="9525" cap="flat" cmpd="sng" algn="ctr">
-                      <a:solidFill>
-                        <a:srgbClr val="D6DBDF"/>
-                      </a:solidFill>
-                      <a:prstDash val="solid"/>
-                      <a:round/>
-                      <a:headEnd type="none" w="med" len="med"/>
-                      <a:tailEnd type="none" w="med" len="med"/>
-                    </a:lnL>
-                    <a:lnR w="9525" cap="flat" cmpd="sng" algn="ctr">
-                      <a:solidFill>
-                        <a:srgbClr val="D6DBDF"/>
-                      </a:solidFill>
-                      <a:prstDash val="solid"/>
-                      <a:round/>
-                      <a:headEnd type="none" w="med" len="med"/>
-                      <a:tailEnd type="none" w="med" len="med"/>
-                    </a:lnR>
-                    <a:lnT w="9525" cap="flat" cmpd="sng" algn="ctr">
-                      <a:solidFill>
-                        <a:srgbClr val="D6DBDF"/>
-                      </a:solidFill>
-                      <a:prstDash val="solid"/>
-                      <a:round/>
-                      <a:headEnd type="none" w="med" len="med"/>
-                      <a:tailEnd type="none" w="med" len="med"/>
-                    </a:lnT>
-                    <a:lnB w="9525" cap="flat" cmpd="sng" algn="ctr">
-                      <a:solidFill>
-                        <a:srgbClr val="D6DBDF"/>
-                      </a:solidFill>
-                      <a:prstDash val="solid"/>
-                      <a:round/>
-                      <a:headEnd type="none" w="med" len="med"/>
-                      <a:tailEnd type="none" w="med" len="med"/>
-                    </a:lnB>
-                    <a:solidFill>
-                      <a:srgbClr val="FFFFFF"/>
-                    </a:solidFill>
-                  </a:tcPr>
-                </a:tc>
-              </a:tr>
             </a:tbl>
           </a:graphicData>
         </a:graphic>
@@ -20288,7 +19963,7 @@
         </p:nvSpPr>
         <p:spPr>
           <a:xfrm>
-            <a:off x="411480" y="3520440"/>
+            <a:off x="411480" y="3063240"/>
             <a:ext cx="8412480" cy="237744"/>
           </a:xfrm>
           <a:prstGeom prst="rect">
@@ -20313,7 +19988,7 @@
                 <a:ea typeface="Outfit" pitchFamily="34" charset="-122"/>
                 <a:cs typeface="Outfit" pitchFamily="34" charset="-120"/>
               </a:rPr>
-              <a:t>Coefficient — example vs. non-example:</a:t>
+              <a:t>Exponent — example vs. non-example:</a:t>
             </a:r>
             <a:endParaRPr lang="en-US" sz="950" dirty="0"/>
           </a:p>
@@ -20327,7 +20002,7 @@
         </p:nvSpPr>
         <p:spPr>
           <a:xfrm>
-            <a:off x="411480" y="3813048"/>
+            <a:off x="411480" y="3355848"/>
             <a:ext cx="4114800" cy="457200"/>
           </a:xfrm>
           <a:prstGeom prst="roundRect">
@@ -20361,7 +20036,7 @@
         </p:nvSpPr>
         <p:spPr>
           <a:xfrm>
-            <a:off x="521208" y="3813048"/>
+            <a:off x="521208" y="3355848"/>
             <a:ext cx="3895344" cy="457200"/>
           </a:xfrm>
           <a:prstGeom prst="rect">
@@ -20400,7 +20075,7 @@
                 <a:ea typeface="Hanken Grotesk" pitchFamily="34" charset="-122"/>
                 <a:cs typeface="Hanken Grotesk" pitchFamily="34" charset="-120"/>
               </a:rPr>
-              <a:t>The 7 in 7n  </a:t>
+              <a:t>The 4 in 3⁴  </a:t>
             </a:r>
             <a:pPr indent="0" marL="0">
               <a:buNone/>
@@ -20414,7 +20089,7 @@
                 <a:ea typeface="Hanken Grotesk" pitchFamily="34" charset="-122"/>
                 <a:cs typeface="Hanken Grotesk" pitchFamily="34" charset="-120"/>
               </a:rPr>
-              <a:t>It is the number multiplied by the variable n.</a:t>
+              <a:t>It shows 3 is multiplied 4 times.</a:t>
             </a:r>
             <a:endParaRPr lang="en-US" sz="900" dirty="0"/>
           </a:p>
@@ -20428,7 +20103,7 @@
         </p:nvSpPr>
         <p:spPr>
           <a:xfrm>
-            <a:off x="4663440" y="3813048"/>
+            <a:off x="4663440" y="3355848"/>
             <a:ext cx="4114800" cy="457200"/>
           </a:xfrm>
           <a:prstGeom prst="roundRect">
@@ -20462,7 +20137,7 @@
         </p:nvSpPr>
         <p:spPr>
           <a:xfrm>
-            <a:off x="4773168" y="3813048"/>
+            <a:off x="4773168" y="3355848"/>
             <a:ext cx="3895344" cy="457200"/>
           </a:xfrm>
           <a:prstGeom prst="rect">
@@ -20501,7 +20176,7 @@
                 <a:ea typeface="Hanken Grotesk" pitchFamily="34" charset="-122"/>
                 <a:cs typeface="Hanken Grotesk" pitchFamily="34" charset="-120"/>
               </a:rPr>
-              <a:t>The n in 7n  </a:t>
+              <a:t>The 3 in 3⁴  </a:t>
             </a:r>
             <a:pPr indent="0" marL="0">
               <a:buNone/>
@@ -20515,7 +20190,7 @@
                 <a:ea typeface="Hanken Grotesk" pitchFamily="34" charset="-122"/>
                 <a:cs typeface="Hanken Grotesk" pitchFamily="34" charset="-120"/>
               </a:rPr>
-              <a:t>n is the variable, not the coefficient.</a:t>
+              <a:t>The 3 is the base, not the exponent.</a:t>
             </a:r>
             <a:endParaRPr lang="en-US" sz="900" dirty="0"/>
           </a:p>
@@ -20688,7 +20363,7 @@
                 <a:ea typeface="Outfit" pitchFamily="34" charset="-122"/>
                 <a:cs typeface="Outfit" pitchFamily="34" charset="-120"/>
               </a:rPr>
-              <a:t>6.AT.6a</a:t>
+              <a:t>6.AT.5</a:t>
             </a:r>
             <a:endParaRPr lang="en-US" sz="900" dirty="0"/>
           </a:p>
@@ -20907,7 +20582,7 @@
                 <a:ea typeface="Hanken Grotesk" pitchFamily="34" charset="-122"/>
                 <a:cs typeface="Hanken Grotesk" pitchFamily="34" charset="-120"/>
               </a:rPr>
-              <a:t>Reveal Math Grade 6  ·  Unit 6  ·  Lesson 6-3</a:t>
+              <a:t>Reveal Math Grade 6  ·  Unit 6  ·  Lesson 6-1</a:t>
             </a:r>
             <a:endParaRPr lang="en-US" sz="750" dirty="0"/>
           </a:p>
@@ -21062,7 +20737,7 @@
                 <a:ea typeface="Outfit" pitchFamily="34" charset="-122"/>
                 <a:cs typeface="Outfit" pitchFamily="34" charset="-120"/>
               </a:rPr>
-              <a:t>How do we turn words into an expression?</a:t>
+              <a:t>What does an exponent mean?</a:t>
             </a:r>
             <a:endParaRPr lang="en-US" sz="1200" dirty="0"/>
           </a:p>
@@ -21160,7 +20835,7 @@
                 <a:ea typeface="Hanken Grotesk" pitchFamily="34" charset="-122"/>
                 <a:cs typeface="Hanken Grotesk" pitchFamily="34" charset="-120"/>
               </a:rPr>
-              <a:t>Let's write a simpler one: "$5 for each drink, d drinks."</a:t>
+              <a:t>Now let's find 5². How many times do we multiply 5 by itself?</a:t>
             </a:r>
             <a:endParaRPr lang="en-US" sz="1050" dirty="0"/>
           </a:p>
@@ -21258,7 +20933,7 @@
                 <a:ea typeface="Hanken Grotesk" pitchFamily="34" charset="-122"/>
                 <a:cs typeface="Hanken Grotesk" pitchFamily="34" charset="-120"/>
               </a:rPr>
-              <a:t>What does "$5 for each drink" tell us to do? Yes, multiply 5 by d.</a:t>
+              <a:t>The exponent is 2, so we write 5 × 5.</a:t>
             </a:r>
             <a:endParaRPr lang="en-US" sz="1050" dirty="0"/>
           </a:p>
@@ -21356,7 +21031,7 @@
                 <a:ea typeface="Hanken Grotesk" pitchFamily="34" charset="-122"/>
                 <a:cs typeface="Hanken Grotesk" pitchFamily="34" charset="-120"/>
               </a:rPr>
-              <a:t>So the expression is 5d.</a:t>
+              <a:t>What is 5 × 5? Yes, 25. So 5² = 25.</a:t>
             </a:r>
             <a:endParaRPr lang="en-US" sz="1050" dirty="0"/>
           </a:p>
@@ -21532,7 +21207,7 @@
                 <a:ea typeface="Hanken Grotesk" pitchFamily="34" charset="-122"/>
                 <a:cs typeface="Hanken Grotesk" pitchFamily="34" charset="-120"/>
               </a:rPr>
-              <a:t>Tickets cost $12 each with a flat $50 venue fee. If t is the number of tickets, how would you write an expression for total revenue, and which part changes with the crowd?</a:t>
+              <a:t>In the sound studio, the volume doubles each time you flip the switch. Why is the volume after 3 flips 2³ = 8 and not 2 × 3 = 6?</a:t>
             </a:r>
             <a:endParaRPr lang="en-US" sz="1000" dirty="0"/>
           </a:p>
@@ -21644,7 +21319,7 @@
                 <a:ea typeface="Hanken Grotesk" pitchFamily="34" charset="-122"/>
                 <a:cs typeface="Hanken Grotesk" pitchFamily="34" charset="-120"/>
               </a:rPr>
-              <a:t>Words like "each" or "per" mean multiply, and "plus" or "more than" mean add.</a:t>
+              <a:t>A power like 2³ is a short way to write repeated multiplication: 2 × 2 × 2.</a:t>
             </a:r>
             <a:endParaRPr lang="en-US" sz="950" dirty="0"/>
           </a:p>
